--- a/算法处理流程_单页.pptx
+++ b/算法处理流程_单页.pptx
@@ -4,10 +4,14 @@
   <p:sldMasterIdLst>
     <p:sldMasterId id="2147483648" r:id="rId1"/>
   </p:sldMasterIdLst>
+  <p:notesMasterIdLst>
+    <p:notesMasterId r:id="rId4"/>
+  </p:notesMasterIdLst>
   <p:sldIdLst>
-    <p:sldId id="256" r:id="rId7"/>
+    <p:sldId id="256" r:id="rId2"/>
+    <p:sldId id="292" r:id="rId3"/>
   </p:sldIdLst>
-  <p:sldSz cx="12191695" cy="6858000" type="screen4x3"/>
+  <p:sldSz cx="12192000" cy="6858000"/>
   <p:notesSz cx="6858000" cy="9144000"/>
   <p:defaultTextStyle>
     <a:defPPr>
@@ -104,7 +108,505 @@
       </a:defRPr>
     </a:lvl9pPr>
   </p:defaultTextStyle>
+  <p:extLst>
+    <p:ext uri="{EFAFB233-063F-42B5-8137-9DF3F51BA10A}">
+      <p15:sldGuideLst xmlns:p15="http://schemas.microsoft.com/office/powerpoint/2012/main">
+        <p15:guide id="1" orient="horz" pos="2160">
+          <p15:clr>
+            <a:srgbClr val="A4A3A4"/>
+          </p15:clr>
+        </p15:guide>
+        <p15:guide id="2" pos="2880">
+          <p15:clr>
+            <a:srgbClr val="A4A3A4"/>
+          </p15:clr>
+        </p15:guide>
+      </p15:sldGuideLst>
+    </p:ext>
+  </p:extLst>
 </p:presentation>
+</file>
+
+<file path=ppt/notesMasters/notesMaster1.xml><?xml version="1.0" encoding="utf-8"?>
+<p:notesMaster xmlns:a="http://schemas.openxmlformats.org/drawingml/2006/main" xmlns:r="http://schemas.openxmlformats.org/officeDocument/2006/relationships" xmlns:p="http://schemas.openxmlformats.org/presentationml/2006/main">
+  <p:cSld>
+    <p:bg>
+      <p:bgRef idx="1001">
+        <a:schemeClr val="bg1"/>
+      </p:bgRef>
+    </p:bg>
+    <p:spTree>
+      <p:nvGrpSpPr>
+        <p:cNvPr id="1" name=""/>
+        <p:cNvGrpSpPr/>
+        <p:nvPr/>
+      </p:nvGrpSpPr>
+      <p:grpSpPr>
+        <a:xfrm>
+          <a:off x="0" y="0"/>
+          <a:ext cx="0" cy="0"/>
+          <a:chOff x="0" y="0"/>
+          <a:chExt cx="0" cy="0"/>
+        </a:xfrm>
+      </p:grpSpPr>
+      <p:sp>
+        <p:nvSpPr>
+          <p:cNvPr id="2" name="页眉占位符 1"/>
+          <p:cNvSpPr>
+            <a:spLocks noGrp="1"/>
+          </p:cNvSpPr>
+          <p:nvPr>
+            <p:ph type="hdr" sz="quarter"/>
+          </p:nvPr>
+        </p:nvSpPr>
+        <p:spPr>
+          <a:xfrm>
+            <a:off x="0" y="0"/>
+            <a:ext cx="2971800" cy="458788"/>
+          </a:xfrm>
+          <a:prstGeom prst="rect">
+            <a:avLst/>
+          </a:prstGeom>
+        </p:spPr>
+        <p:txBody>
+          <a:bodyPr vert="horz" lIns="91440" tIns="45720" rIns="91440" bIns="45720" rtlCol="0"/>
+          <a:lstStyle>
+            <a:lvl1pPr algn="l">
+              <a:defRPr sz="1200"/>
+            </a:lvl1pPr>
+          </a:lstStyle>
+          <a:p>
+            <a:endParaRPr lang="zh-CN" altLang="en-US"/>
+          </a:p>
+        </p:txBody>
+      </p:sp>
+      <p:sp>
+        <p:nvSpPr>
+          <p:cNvPr id="3" name="日期占位符 2"/>
+          <p:cNvSpPr>
+            <a:spLocks noGrp="1"/>
+          </p:cNvSpPr>
+          <p:nvPr>
+            <p:ph type="dt" idx="1"/>
+          </p:nvPr>
+        </p:nvSpPr>
+        <p:spPr>
+          <a:xfrm>
+            <a:off x="3884613" y="0"/>
+            <a:ext cx="2971800" cy="458788"/>
+          </a:xfrm>
+          <a:prstGeom prst="rect">
+            <a:avLst/>
+          </a:prstGeom>
+        </p:spPr>
+        <p:txBody>
+          <a:bodyPr vert="horz" lIns="91440" tIns="45720" rIns="91440" bIns="45720" rtlCol="0"/>
+          <a:lstStyle>
+            <a:lvl1pPr algn="r">
+              <a:defRPr sz="1200"/>
+            </a:lvl1pPr>
+          </a:lstStyle>
+          <a:p>
+            <a:fld id="{DD71C58A-300A-42BE-BD24-5B8EC42DA17E}" type="datetimeFigureOut">
+              <a:rPr lang="zh-CN" altLang="en-US" smtClean="0"/>
+              <a:t>2026/10/22</a:t>
+            </a:fld>
+            <a:endParaRPr lang="zh-CN" altLang="en-US"/>
+          </a:p>
+        </p:txBody>
+      </p:sp>
+      <p:sp>
+        <p:nvSpPr>
+          <p:cNvPr id="4" name="幻灯片图像占位符 3"/>
+          <p:cNvSpPr>
+            <a:spLocks noGrp="1" noRot="1" noChangeAspect="1"/>
+          </p:cNvSpPr>
+          <p:nvPr>
+            <p:ph type="sldImg" idx="2"/>
+          </p:nvPr>
+        </p:nvSpPr>
+        <p:spPr>
+          <a:xfrm>
+            <a:off x="685800" y="1143000"/>
+            <a:ext cx="5486400" cy="3086100"/>
+          </a:xfrm>
+          <a:prstGeom prst="rect">
+            <a:avLst/>
+          </a:prstGeom>
+          <a:noFill/>
+          <a:ln w="12700">
+            <a:solidFill>
+              <a:prstClr val="black"/>
+            </a:solidFill>
+          </a:ln>
+        </p:spPr>
+        <p:txBody>
+          <a:bodyPr vert="horz" lIns="91440" tIns="45720" rIns="91440" bIns="45720" rtlCol="0" anchor="ctr"/>
+          <a:lstStyle/>
+          <a:p>
+            <a:endParaRPr lang="zh-CN" altLang="en-US"/>
+          </a:p>
+        </p:txBody>
+      </p:sp>
+      <p:sp>
+        <p:nvSpPr>
+          <p:cNvPr id="5" name="备注占位符 4"/>
+          <p:cNvSpPr>
+            <a:spLocks noGrp="1"/>
+          </p:cNvSpPr>
+          <p:nvPr>
+            <p:ph type="body" sz="quarter" idx="3"/>
+          </p:nvPr>
+        </p:nvSpPr>
+        <p:spPr>
+          <a:xfrm>
+            <a:off x="685800" y="4400550"/>
+            <a:ext cx="5486400" cy="3600450"/>
+          </a:xfrm>
+          <a:prstGeom prst="rect">
+            <a:avLst/>
+          </a:prstGeom>
+        </p:spPr>
+        <p:txBody>
+          <a:bodyPr vert="horz" lIns="91440" tIns="45720" rIns="91440" bIns="45720" rtlCol="0"/>
+          <a:lstStyle/>
+          <a:p>
+            <a:pPr lvl="0"/>
+            <a:r>
+              <a:rPr lang="zh-CN" altLang="en-US"/>
+              <a:t>单击此处编辑母版文本样式</a:t>
+            </a:r>
+          </a:p>
+          <a:p>
+            <a:pPr lvl="1"/>
+            <a:r>
+              <a:rPr lang="zh-CN" altLang="en-US"/>
+              <a:t>二级</a:t>
+            </a:r>
+          </a:p>
+          <a:p>
+            <a:pPr lvl="2"/>
+            <a:r>
+              <a:rPr lang="zh-CN" altLang="en-US"/>
+              <a:t>三级</a:t>
+            </a:r>
+          </a:p>
+          <a:p>
+            <a:pPr lvl="3"/>
+            <a:r>
+              <a:rPr lang="zh-CN" altLang="en-US"/>
+              <a:t>四级</a:t>
+            </a:r>
+          </a:p>
+          <a:p>
+            <a:pPr lvl="4"/>
+            <a:r>
+              <a:rPr lang="zh-CN" altLang="en-US"/>
+              <a:t>五级</a:t>
+            </a:r>
+          </a:p>
+        </p:txBody>
+      </p:sp>
+      <p:sp>
+        <p:nvSpPr>
+          <p:cNvPr id="6" name="页脚占位符 5"/>
+          <p:cNvSpPr>
+            <a:spLocks noGrp="1"/>
+          </p:cNvSpPr>
+          <p:nvPr>
+            <p:ph type="ftr" sz="quarter" idx="4"/>
+          </p:nvPr>
+        </p:nvSpPr>
+        <p:spPr>
+          <a:xfrm>
+            <a:off x="0" y="8685213"/>
+            <a:ext cx="2971800" cy="458787"/>
+          </a:xfrm>
+          <a:prstGeom prst="rect">
+            <a:avLst/>
+          </a:prstGeom>
+        </p:spPr>
+        <p:txBody>
+          <a:bodyPr vert="horz" lIns="91440" tIns="45720" rIns="91440" bIns="45720" rtlCol="0" anchor="b"/>
+          <a:lstStyle>
+            <a:lvl1pPr algn="l">
+              <a:defRPr sz="1200"/>
+            </a:lvl1pPr>
+          </a:lstStyle>
+          <a:p>
+            <a:endParaRPr lang="zh-CN" altLang="en-US"/>
+          </a:p>
+        </p:txBody>
+      </p:sp>
+      <p:sp>
+        <p:nvSpPr>
+          <p:cNvPr id="7" name="灯片编号占位符 6"/>
+          <p:cNvSpPr>
+            <a:spLocks noGrp="1"/>
+          </p:cNvSpPr>
+          <p:nvPr>
+            <p:ph type="sldNum" sz="quarter" idx="5"/>
+          </p:nvPr>
+        </p:nvSpPr>
+        <p:spPr>
+          <a:xfrm>
+            <a:off x="3884613" y="8685213"/>
+            <a:ext cx="2971800" cy="458787"/>
+          </a:xfrm>
+          <a:prstGeom prst="rect">
+            <a:avLst/>
+          </a:prstGeom>
+        </p:spPr>
+        <p:txBody>
+          <a:bodyPr vert="horz" lIns="91440" tIns="45720" rIns="91440" bIns="45720" rtlCol="0" anchor="b"/>
+          <a:lstStyle>
+            <a:lvl1pPr algn="r">
+              <a:defRPr sz="1200"/>
+            </a:lvl1pPr>
+          </a:lstStyle>
+          <a:p>
+            <a:fld id="{0C960CF8-0524-4876-95D5-BA46E3A2E2DD}" type="slidenum">
+              <a:rPr lang="zh-CN" altLang="en-US" smtClean="0"/>
+              <a:t>‹#›</a:t>
+            </a:fld>
+            <a:endParaRPr lang="zh-CN" altLang="en-US"/>
+          </a:p>
+        </p:txBody>
+      </p:sp>
+    </p:spTree>
+    <p:extLst>
+      <p:ext uri="{BB962C8B-B14F-4D97-AF65-F5344CB8AC3E}">
+        <p14:creationId xmlns:p14="http://schemas.microsoft.com/office/powerpoint/2010/main" val="1329510787"/>
+      </p:ext>
+    </p:extLst>
+  </p:cSld>
+  <p:clrMap bg1="lt1" tx1="dk1" bg2="lt2" tx2="dk2" accent1="accent1" accent2="accent2" accent3="accent3" accent4="accent4" accent5="accent5" accent6="accent6" hlink="hlink" folHlink="folHlink"/>
+  <p:notesStyle>
+    <a:lvl1pPr marL="0" algn="l" defTabSz="914400" rtl="0" eaLnBrk="1" latinLnBrk="0" hangingPunct="1">
+      <a:defRPr sz="1200" kern="1200">
+        <a:solidFill>
+          <a:schemeClr val="tx1"/>
+        </a:solidFill>
+        <a:latin typeface="+mn-lt"/>
+        <a:ea typeface="+mn-ea"/>
+        <a:cs typeface="+mn-cs"/>
+      </a:defRPr>
+    </a:lvl1pPr>
+    <a:lvl2pPr marL="457200" algn="l" defTabSz="914400" rtl="0" eaLnBrk="1" latinLnBrk="0" hangingPunct="1">
+      <a:defRPr sz="1200" kern="1200">
+        <a:solidFill>
+          <a:schemeClr val="tx1"/>
+        </a:solidFill>
+        <a:latin typeface="+mn-lt"/>
+        <a:ea typeface="+mn-ea"/>
+        <a:cs typeface="+mn-cs"/>
+      </a:defRPr>
+    </a:lvl2pPr>
+    <a:lvl3pPr marL="914400" algn="l" defTabSz="914400" rtl="0" eaLnBrk="1" latinLnBrk="0" hangingPunct="1">
+      <a:defRPr sz="1200" kern="1200">
+        <a:solidFill>
+          <a:schemeClr val="tx1"/>
+        </a:solidFill>
+        <a:latin typeface="+mn-lt"/>
+        <a:ea typeface="+mn-ea"/>
+        <a:cs typeface="+mn-cs"/>
+      </a:defRPr>
+    </a:lvl3pPr>
+    <a:lvl4pPr marL="1371600" algn="l" defTabSz="914400" rtl="0" eaLnBrk="1" latinLnBrk="0" hangingPunct="1">
+      <a:defRPr sz="1200" kern="1200">
+        <a:solidFill>
+          <a:schemeClr val="tx1"/>
+        </a:solidFill>
+        <a:latin typeface="+mn-lt"/>
+        <a:ea typeface="+mn-ea"/>
+        <a:cs typeface="+mn-cs"/>
+      </a:defRPr>
+    </a:lvl4pPr>
+    <a:lvl5pPr marL="1828800" algn="l" defTabSz="914400" rtl="0" eaLnBrk="1" latinLnBrk="0" hangingPunct="1">
+      <a:defRPr sz="1200" kern="1200">
+        <a:solidFill>
+          <a:schemeClr val="tx1"/>
+        </a:solidFill>
+        <a:latin typeface="+mn-lt"/>
+        <a:ea typeface="+mn-ea"/>
+        <a:cs typeface="+mn-cs"/>
+      </a:defRPr>
+    </a:lvl5pPr>
+    <a:lvl6pPr marL="2286000" algn="l" defTabSz="914400" rtl="0" eaLnBrk="1" latinLnBrk="0" hangingPunct="1">
+      <a:defRPr sz="1200" kern="1200">
+        <a:solidFill>
+          <a:schemeClr val="tx1"/>
+        </a:solidFill>
+        <a:latin typeface="+mn-lt"/>
+        <a:ea typeface="+mn-ea"/>
+        <a:cs typeface="+mn-cs"/>
+      </a:defRPr>
+    </a:lvl6pPr>
+    <a:lvl7pPr marL="2743200" algn="l" defTabSz="914400" rtl="0" eaLnBrk="1" latinLnBrk="0" hangingPunct="1">
+      <a:defRPr sz="1200" kern="1200">
+        <a:solidFill>
+          <a:schemeClr val="tx1"/>
+        </a:solidFill>
+        <a:latin typeface="+mn-lt"/>
+        <a:ea typeface="+mn-ea"/>
+        <a:cs typeface="+mn-cs"/>
+      </a:defRPr>
+    </a:lvl7pPr>
+    <a:lvl8pPr marL="3200400" algn="l" defTabSz="914400" rtl="0" eaLnBrk="1" latinLnBrk="0" hangingPunct="1">
+      <a:defRPr sz="1200" kern="1200">
+        <a:solidFill>
+          <a:schemeClr val="tx1"/>
+        </a:solidFill>
+        <a:latin typeface="+mn-lt"/>
+        <a:ea typeface="+mn-ea"/>
+        <a:cs typeface="+mn-cs"/>
+      </a:defRPr>
+    </a:lvl8pPr>
+    <a:lvl9pPr marL="3657600" algn="l" defTabSz="914400" rtl="0" eaLnBrk="1" latinLnBrk="0" hangingPunct="1">
+      <a:defRPr sz="1200" kern="1200">
+        <a:solidFill>
+          <a:schemeClr val="tx1"/>
+        </a:solidFill>
+        <a:latin typeface="+mn-lt"/>
+        <a:ea typeface="+mn-ea"/>
+        <a:cs typeface="+mn-cs"/>
+      </a:defRPr>
+    </a:lvl9pPr>
+  </p:notesStyle>
+</p:notesMaster>
+</file>
+
+<file path=ppt/notesSlides/notesSlide1.xml><?xml version="1.0" encoding="utf-8"?>
+<p:notes xmlns:a="http://schemas.openxmlformats.org/drawingml/2006/main" xmlns:r="http://schemas.openxmlformats.org/officeDocument/2006/relationships" xmlns:p="http://schemas.openxmlformats.org/presentationml/2006/main" showMasterSp="0" showMasterPhAnim="0">
+  <p:cSld>
+    <p:spTree>
+      <p:nvGrpSpPr>
+        <p:cNvPr id="1" name="Shape 5186"/>
+        <p:cNvGrpSpPr/>
+        <p:nvPr/>
+      </p:nvGrpSpPr>
+      <p:grpSpPr>
+        <a:xfrm>
+          <a:off x="0" y="0"/>
+          <a:ext cx="0" cy="0"/>
+          <a:chOff x="0" y="0"/>
+          <a:chExt cx="0" cy="0"/>
+        </a:xfrm>
+      </p:grpSpPr>
+      <p:sp>
+        <p:nvSpPr>
+          <p:cNvPr id="5187" name="Google Shape;5187;g78327f1586_217_0:notes"/>
+          <p:cNvSpPr>
+            <a:spLocks noGrp="1" noRot="1" noChangeAspect="1"/>
+          </p:cNvSpPr>
+          <p:nvPr>
+            <p:ph type="sldImg" idx="2"/>
+          </p:nvPr>
+        </p:nvSpPr>
+        <p:spPr>
+          <a:xfrm>
+            <a:off x="381300" y="685800"/>
+            <a:ext cx="6096000" cy="3429000"/>
+          </a:xfrm>
+          <a:custGeom>
+            <a:avLst/>
+            <a:gdLst/>
+            <a:ahLst/>
+            <a:cxnLst/>
+            <a:rect l="l" t="t" r="r" b="b"/>
+            <a:pathLst>
+              <a:path w="120000" h="120000" extrusionOk="0">
+                <a:moveTo>
+                  <a:pt x="0" y="0"/>
+                </a:moveTo>
+                <a:lnTo>
+                  <a:pt x="120000" y="0"/>
+                </a:lnTo>
+                <a:lnTo>
+                  <a:pt x="120000" y="120000"/>
+                </a:lnTo>
+                <a:lnTo>
+                  <a:pt x="0" y="120000"/>
+                </a:lnTo>
+                <a:close/>
+              </a:path>
+            </a:pathLst>
+          </a:custGeom>
+        </p:spPr>
+      </p:sp>
+      <p:sp>
+        <p:nvSpPr>
+          <p:cNvPr id="5188" name="Google Shape;5188;g78327f1586_217_0:notes"/>
+          <p:cNvSpPr txBox="1">
+            <a:spLocks noGrp="1"/>
+          </p:cNvSpPr>
+          <p:nvPr>
+            <p:ph type="body" idx="1"/>
+          </p:nvPr>
+        </p:nvSpPr>
+        <p:spPr>
+          <a:xfrm>
+            <a:off x="685800" y="4343400"/>
+            <a:ext cx="5486400" cy="4114800"/>
+          </a:xfrm>
+          <a:prstGeom prst="rect">
+            <a:avLst/>
+          </a:prstGeom>
+        </p:spPr>
+        <p:txBody>
+          <a:bodyPr spcFirstLastPara="1" wrap="square" lIns="91425" tIns="91425" rIns="91425" bIns="91425" anchor="t" anchorCtr="0">
+            <a:noAutofit/>
+          </a:bodyPr>
+          <a:lstStyle/>
+          <a:p>
+            <a:pPr marL="0" lvl="0" indent="0" algn="l" rtl="0">
+              <a:spcBef>
+                <a:spcPts val="0"/>
+              </a:spcBef>
+              <a:spcAft>
+                <a:spcPts val="0"/>
+              </a:spcAft>
+              <a:buNone/>
+            </a:pPr>
+            <a:r>
+              <a:rPr lang="en"/>
+              <a:t>By </a:t>
+            </a:r>
+            <a:r>
+              <a:rPr lang="en" u="sng">
+                <a:solidFill>
+                  <a:schemeClr val="hlink"/>
+                </a:solidFill>
+                <a:hlinkClick r:id="rId3"/>
+              </a:rPr>
+              <a:t>@srvmshr</a:t>
+            </a:r>
+            <a:endParaRPr/>
+          </a:p>
+          <a:p>
+            <a:pPr marL="0" lvl="0" indent="0" algn="l" rtl="0">
+              <a:spcBef>
+                <a:spcPts val="0"/>
+              </a:spcBef>
+              <a:spcAft>
+                <a:spcPts val="0"/>
+              </a:spcAft>
+              <a:buNone/>
+            </a:pPr>
+            <a:r>
+              <a:rPr lang="en"/>
+              <a:t>sourav@yahoo.com</a:t>
+            </a:r>
+            <a:endParaRPr/>
+          </a:p>
+        </p:txBody>
+      </p:sp>
+    </p:spTree>
+  </p:cSld>
+  <p:clrMapOvr>
+    <a:masterClrMapping/>
+  </p:clrMapOvr>
+</p:notes>
 </file>
 
 <file path=ppt/slideLayouts/slideLayout1.xml><?xml version="1.0" encoding="utf-8"?>
@@ -145,10 +647,9 @@
           <a:lstStyle/>
           <a:p>
             <a:r>
-              <a:rPr lang="en-US" smtClean="0"/>
+              <a:rPr lang="en-US"/>
               <a:t>Click to edit Master title style</a:t>
             </a:r>
-            <a:endParaRPr lang="en-US"/>
           </a:p>
         </p:txBody>
       </p:sp>
@@ -264,10 +765,9 @@
           </a:lstStyle>
           <a:p>
             <a:r>
-              <a:rPr lang="en-US" smtClean="0"/>
+              <a:rPr lang="en-US"/>
               <a:t>Click to edit Master subtitle style</a:t>
             </a:r>
-            <a:endParaRPr lang="en-US"/>
           </a:p>
         </p:txBody>
       </p:sp>
@@ -288,7 +788,7 @@
           <a:p>
             <a:fld id="{5BCAD085-E8A6-8845-BD4E-CB4CCA059FC4}" type="datetimeFigureOut">
               <a:rPr lang="en-US" smtClean="0"/>
-              <a:t>1/27/13</a:t>
+              <a:t>10/22/2026</a:t>
             </a:fld>
             <a:endParaRPr lang="en-US"/>
           </a:p>
@@ -382,10 +882,9 @@
           <a:lstStyle/>
           <a:p>
             <a:r>
-              <a:rPr lang="en-US" smtClean="0"/>
+              <a:rPr lang="en-US"/>
               <a:t>Click to edit Master title style</a:t>
             </a:r>
-            <a:endParaRPr lang="en-US"/>
           </a:p>
         </p:txBody>
       </p:sp>
@@ -406,38 +905,37 @@
           <a:p>
             <a:pPr lvl="0"/>
             <a:r>
-              <a:rPr lang="en-US" smtClean="0"/>
+              <a:rPr lang="en-US"/>
               <a:t>Click to edit Master text styles</a:t>
             </a:r>
           </a:p>
           <a:p>
             <a:pPr lvl="1"/>
             <a:r>
-              <a:rPr lang="en-US" smtClean="0"/>
+              <a:rPr lang="en-US"/>
               <a:t>Second level</a:t>
             </a:r>
           </a:p>
           <a:p>
             <a:pPr lvl="2"/>
             <a:r>
-              <a:rPr lang="en-US" smtClean="0"/>
+              <a:rPr lang="en-US"/>
               <a:t>Third level</a:t>
             </a:r>
           </a:p>
           <a:p>
             <a:pPr lvl="3"/>
             <a:r>
-              <a:rPr lang="en-US" smtClean="0"/>
+              <a:rPr lang="en-US"/>
               <a:t>Fourth level</a:t>
             </a:r>
           </a:p>
           <a:p>
             <a:pPr lvl="4"/>
             <a:r>
-              <a:rPr lang="en-US" smtClean="0"/>
+              <a:rPr lang="en-US"/>
               <a:t>Fifth level</a:t>
             </a:r>
-            <a:endParaRPr lang="en-US"/>
           </a:p>
         </p:txBody>
       </p:sp>
@@ -458,7 +956,7 @@
           <a:p>
             <a:fld id="{5BCAD085-E8A6-8845-BD4E-CB4CCA059FC4}" type="datetimeFigureOut">
               <a:rPr lang="en-US" smtClean="0"/>
-              <a:t>1/27/13</a:t>
+              <a:t>10/22/2026</a:t>
             </a:fld>
             <a:endParaRPr lang="en-US"/>
           </a:p>
@@ -557,10 +1055,9 @@
           <a:lstStyle/>
           <a:p>
             <a:r>
-              <a:rPr lang="en-US" smtClean="0"/>
+              <a:rPr lang="en-US"/>
               <a:t>Click to edit Master title style</a:t>
             </a:r>
-            <a:endParaRPr lang="en-US"/>
           </a:p>
         </p:txBody>
       </p:sp>
@@ -586,38 +1083,37 @@
           <a:p>
             <a:pPr lvl="0"/>
             <a:r>
-              <a:rPr lang="en-US" smtClean="0"/>
+              <a:rPr lang="en-US"/>
               <a:t>Click to edit Master text styles</a:t>
             </a:r>
           </a:p>
           <a:p>
             <a:pPr lvl="1"/>
             <a:r>
-              <a:rPr lang="en-US" smtClean="0"/>
+              <a:rPr lang="en-US"/>
               <a:t>Second level</a:t>
             </a:r>
           </a:p>
           <a:p>
             <a:pPr lvl="2"/>
             <a:r>
-              <a:rPr lang="en-US" smtClean="0"/>
+              <a:rPr lang="en-US"/>
               <a:t>Third level</a:t>
             </a:r>
           </a:p>
           <a:p>
             <a:pPr lvl="3"/>
             <a:r>
-              <a:rPr lang="en-US" smtClean="0"/>
+              <a:rPr lang="en-US"/>
               <a:t>Fourth level</a:t>
             </a:r>
           </a:p>
           <a:p>
             <a:pPr lvl="4"/>
             <a:r>
-              <a:rPr lang="en-US" smtClean="0"/>
+              <a:rPr lang="en-US"/>
               <a:t>Fifth level</a:t>
             </a:r>
-            <a:endParaRPr lang="en-US"/>
           </a:p>
         </p:txBody>
       </p:sp>
@@ -638,7 +1134,7 @@
           <a:p>
             <a:fld id="{5BCAD085-E8A6-8845-BD4E-CB4CCA059FC4}" type="datetimeFigureOut">
               <a:rPr lang="en-US" smtClean="0"/>
-              <a:t>1/27/13</a:t>
+              <a:t>10/22/2026</a:t>
             </a:fld>
             <a:endParaRPr lang="en-US"/>
           </a:p>
@@ -732,10 +1228,9 @@
           <a:lstStyle/>
           <a:p>
             <a:r>
-              <a:rPr lang="en-US" smtClean="0"/>
+              <a:rPr lang="en-US"/>
               <a:t>Click to edit Master title style</a:t>
             </a:r>
-            <a:endParaRPr lang="en-US"/>
           </a:p>
         </p:txBody>
       </p:sp>
@@ -756,38 +1251,37 @@
           <a:p>
             <a:pPr lvl="0"/>
             <a:r>
-              <a:rPr lang="en-US" smtClean="0"/>
+              <a:rPr lang="en-US"/>
               <a:t>Click to edit Master text styles</a:t>
             </a:r>
           </a:p>
           <a:p>
             <a:pPr lvl="1"/>
             <a:r>
-              <a:rPr lang="en-US" smtClean="0"/>
+              <a:rPr lang="en-US"/>
               <a:t>Second level</a:t>
             </a:r>
           </a:p>
           <a:p>
             <a:pPr lvl="2"/>
             <a:r>
-              <a:rPr lang="en-US" smtClean="0"/>
+              <a:rPr lang="en-US"/>
               <a:t>Third level</a:t>
             </a:r>
           </a:p>
           <a:p>
             <a:pPr lvl="3"/>
             <a:r>
-              <a:rPr lang="en-US" smtClean="0"/>
+              <a:rPr lang="en-US"/>
               <a:t>Fourth level</a:t>
             </a:r>
           </a:p>
           <a:p>
             <a:pPr lvl="4"/>
             <a:r>
-              <a:rPr lang="en-US" smtClean="0"/>
+              <a:rPr lang="en-US"/>
               <a:t>Fifth level</a:t>
             </a:r>
-            <a:endParaRPr lang="en-US"/>
           </a:p>
         </p:txBody>
       </p:sp>
@@ -808,7 +1302,7 @@
           <a:p>
             <a:fld id="{5BCAD085-E8A6-8845-BD4E-CB4CCA059FC4}" type="datetimeFigureOut">
               <a:rPr lang="en-US" smtClean="0"/>
-              <a:t>1/27/13</a:t>
+              <a:t>10/22/2026</a:t>
             </a:fld>
             <a:endParaRPr lang="en-US"/>
           </a:p>
@@ -911,10 +1405,9 @@
           </a:lstStyle>
           <a:p>
             <a:r>
-              <a:rPr lang="en-US" smtClean="0"/>
+              <a:rPr lang="en-US"/>
               <a:t>Click to edit Master title style</a:t>
             </a:r>
-            <a:endParaRPr lang="en-US"/>
           </a:p>
         </p:txBody>
       </p:sp>
@@ -1031,7 +1524,7 @@
           <a:p>
             <a:pPr lvl="0"/>
             <a:r>
-              <a:rPr lang="en-US" smtClean="0"/>
+              <a:rPr lang="en-US"/>
               <a:t>Click to edit Master text styles</a:t>
             </a:r>
           </a:p>
@@ -1054,7 +1547,7 @@
           <a:p>
             <a:fld id="{5BCAD085-E8A6-8845-BD4E-CB4CCA059FC4}" type="datetimeFigureOut">
               <a:rPr lang="en-US" smtClean="0"/>
-              <a:t>1/27/13</a:t>
+              <a:t>10/22/2026</a:t>
             </a:fld>
             <a:endParaRPr lang="en-US"/>
           </a:p>
@@ -1148,10 +1641,9 @@
           <a:lstStyle/>
           <a:p>
             <a:r>
-              <a:rPr lang="en-US" smtClean="0"/>
+              <a:rPr lang="en-US"/>
               <a:t>Click to edit Master title style</a:t>
             </a:r>
-            <a:endParaRPr lang="en-US"/>
           </a:p>
         </p:txBody>
       </p:sp>
@@ -1205,38 +1697,37 @@
           <a:p>
             <a:pPr lvl="0"/>
             <a:r>
-              <a:rPr lang="en-US" smtClean="0"/>
+              <a:rPr lang="en-US"/>
               <a:t>Click to edit Master text styles</a:t>
             </a:r>
           </a:p>
           <a:p>
             <a:pPr lvl="1"/>
             <a:r>
-              <a:rPr lang="en-US" smtClean="0"/>
+              <a:rPr lang="en-US"/>
               <a:t>Second level</a:t>
             </a:r>
           </a:p>
           <a:p>
             <a:pPr lvl="2"/>
             <a:r>
-              <a:rPr lang="en-US" smtClean="0"/>
+              <a:rPr lang="en-US"/>
               <a:t>Third level</a:t>
             </a:r>
           </a:p>
           <a:p>
             <a:pPr lvl="3"/>
             <a:r>
-              <a:rPr lang="en-US" smtClean="0"/>
+              <a:rPr lang="en-US"/>
               <a:t>Fourth level</a:t>
             </a:r>
           </a:p>
           <a:p>
             <a:pPr lvl="4"/>
             <a:r>
-              <a:rPr lang="en-US" smtClean="0"/>
+              <a:rPr lang="en-US"/>
               <a:t>Fifth level</a:t>
             </a:r>
-            <a:endParaRPr lang="en-US"/>
           </a:p>
         </p:txBody>
       </p:sp>
@@ -1290,38 +1781,37 @@
           <a:p>
             <a:pPr lvl="0"/>
             <a:r>
-              <a:rPr lang="en-US" smtClean="0"/>
+              <a:rPr lang="en-US"/>
               <a:t>Click to edit Master text styles</a:t>
             </a:r>
           </a:p>
           <a:p>
             <a:pPr lvl="1"/>
             <a:r>
-              <a:rPr lang="en-US" smtClean="0"/>
+              <a:rPr lang="en-US"/>
               <a:t>Second level</a:t>
             </a:r>
           </a:p>
           <a:p>
             <a:pPr lvl="2"/>
             <a:r>
-              <a:rPr lang="en-US" smtClean="0"/>
+              <a:rPr lang="en-US"/>
               <a:t>Third level</a:t>
             </a:r>
           </a:p>
           <a:p>
             <a:pPr lvl="3"/>
             <a:r>
-              <a:rPr lang="en-US" smtClean="0"/>
+              <a:rPr lang="en-US"/>
               <a:t>Fourth level</a:t>
             </a:r>
           </a:p>
           <a:p>
             <a:pPr lvl="4"/>
             <a:r>
-              <a:rPr lang="en-US" smtClean="0"/>
+              <a:rPr lang="en-US"/>
               <a:t>Fifth level</a:t>
             </a:r>
-            <a:endParaRPr lang="en-US"/>
           </a:p>
         </p:txBody>
       </p:sp>
@@ -1342,7 +1832,7 @@
           <a:p>
             <a:fld id="{5BCAD085-E8A6-8845-BD4E-CB4CCA059FC4}" type="datetimeFigureOut">
               <a:rPr lang="en-US" smtClean="0"/>
-              <a:t>1/27/13</a:t>
+              <a:t>10/22/2026</a:t>
             </a:fld>
             <a:endParaRPr lang="en-US"/>
           </a:p>
@@ -1440,10 +1930,9 @@
           </a:lstStyle>
           <a:p>
             <a:r>
-              <a:rPr lang="en-US" smtClean="0"/>
+              <a:rPr lang="en-US"/>
               <a:t>Click to edit Master title style</a:t>
             </a:r>
-            <a:endParaRPr lang="en-US"/>
           </a:p>
         </p:txBody>
       </p:sp>
@@ -1506,7 +1995,7 @@
           <a:p>
             <a:pPr lvl="0"/>
             <a:r>
-              <a:rPr lang="en-US" smtClean="0"/>
+              <a:rPr lang="en-US"/>
               <a:t>Click to edit Master text styles</a:t>
             </a:r>
           </a:p>
@@ -1562,38 +2051,37 @@
           <a:p>
             <a:pPr lvl="0"/>
             <a:r>
-              <a:rPr lang="en-US" smtClean="0"/>
+              <a:rPr lang="en-US"/>
               <a:t>Click to edit Master text styles</a:t>
             </a:r>
           </a:p>
           <a:p>
             <a:pPr lvl="1"/>
             <a:r>
-              <a:rPr lang="en-US" smtClean="0"/>
+              <a:rPr lang="en-US"/>
               <a:t>Second level</a:t>
             </a:r>
           </a:p>
           <a:p>
             <a:pPr lvl="2"/>
             <a:r>
-              <a:rPr lang="en-US" smtClean="0"/>
+              <a:rPr lang="en-US"/>
               <a:t>Third level</a:t>
             </a:r>
           </a:p>
           <a:p>
             <a:pPr lvl="3"/>
             <a:r>
-              <a:rPr lang="en-US" smtClean="0"/>
+              <a:rPr lang="en-US"/>
               <a:t>Fourth level</a:t>
             </a:r>
           </a:p>
           <a:p>
             <a:pPr lvl="4"/>
             <a:r>
-              <a:rPr lang="en-US" smtClean="0"/>
+              <a:rPr lang="en-US"/>
               <a:t>Fifth level</a:t>
             </a:r>
-            <a:endParaRPr lang="en-US"/>
           </a:p>
         </p:txBody>
       </p:sp>
@@ -1656,7 +2144,7 @@
           <a:p>
             <a:pPr lvl="0"/>
             <a:r>
-              <a:rPr lang="en-US" smtClean="0"/>
+              <a:rPr lang="en-US"/>
               <a:t>Click to edit Master text styles</a:t>
             </a:r>
           </a:p>
@@ -1712,38 +2200,37 @@
           <a:p>
             <a:pPr lvl="0"/>
             <a:r>
-              <a:rPr lang="en-US" smtClean="0"/>
+              <a:rPr lang="en-US"/>
               <a:t>Click to edit Master text styles</a:t>
             </a:r>
           </a:p>
           <a:p>
             <a:pPr lvl="1"/>
             <a:r>
-              <a:rPr lang="en-US" smtClean="0"/>
+              <a:rPr lang="en-US"/>
               <a:t>Second level</a:t>
             </a:r>
           </a:p>
           <a:p>
             <a:pPr lvl="2"/>
             <a:r>
-              <a:rPr lang="en-US" smtClean="0"/>
+              <a:rPr lang="en-US"/>
               <a:t>Third level</a:t>
             </a:r>
           </a:p>
           <a:p>
             <a:pPr lvl="3"/>
             <a:r>
-              <a:rPr lang="en-US" smtClean="0"/>
+              <a:rPr lang="en-US"/>
               <a:t>Fourth level</a:t>
             </a:r>
           </a:p>
           <a:p>
             <a:pPr lvl="4"/>
             <a:r>
-              <a:rPr lang="en-US" smtClean="0"/>
+              <a:rPr lang="en-US"/>
               <a:t>Fifth level</a:t>
             </a:r>
-            <a:endParaRPr lang="en-US"/>
           </a:p>
         </p:txBody>
       </p:sp>
@@ -1764,7 +2251,7 @@
           <a:p>
             <a:fld id="{5BCAD085-E8A6-8845-BD4E-CB4CCA059FC4}" type="datetimeFigureOut">
               <a:rPr lang="en-US" smtClean="0"/>
-              <a:t>1/27/13</a:t>
+              <a:t>10/22/2026</a:t>
             </a:fld>
             <a:endParaRPr lang="en-US"/>
           </a:p>
@@ -1858,10 +2345,9 @@
           <a:lstStyle/>
           <a:p>
             <a:r>
-              <a:rPr lang="en-US" smtClean="0"/>
+              <a:rPr lang="en-US"/>
               <a:t>Click to edit Master title style</a:t>
             </a:r>
-            <a:endParaRPr lang="en-US"/>
           </a:p>
         </p:txBody>
       </p:sp>
@@ -1882,7 +2368,7 @@
           <a:p>
             <a:fld id="{5BCAD085-E8A6-8845-BD4E-CB4CCA059FC4}" type="datetimeFigureOut">
               <a:rPr lang="en-US" smtClean="0"/>
-              <a:t>1/27/13</a:t>
+              <a:t>10/22/2026</a:t>
             </a:fld>
             <a:endParaRPr lang="en-US"/>
           </a:p>
@@ -1977,7 +2463,7 @@
           <a:p>
             <a:fld id="{5BCAD085-E8A6-8845-BD4E-CB4CCA059FC4}" type="datetimeFigureOut">
               <a:rPr lang="en-US" smtClean="0"/>
-              <a:t>1/27/13</a:t>
+              <a:t>10/22/2026</a:t>
             </a:fld>
             <a:endParaRPr lang="en-US"/>
           </a:p>
@@ -2080,10 +2566,9 @@
           </a:lstStyle>
           <a:p>
             <a:r>
-              <a:rPr lang="en-US" smtClean="0"/>
+              <a:rPr lang="en-US"/>
               <a:t>Click to edit Master title style</a:t>
             </a:r>
-            <a:endParaRPr lang="en-US"/>
           </a:p>
         </p:txBody>
       </p:sp>
@@ -2137,38 +2622,37 @@
           <a:p>
             <a:pPr lvl="0"/>
             <a:r>
-              <a:rPr lang="en-US" smtClean="0"/>
+              <a:rPr lang="en-US"/>
               <a:t>Click to edit Master text styles</a:t>
             </a:r>
           </a:p>
           <a:p>
             <a:pPr lvl="1"/>
             <a:r>
-              <a:rPr lang="en-US" smtClean="0"/>
+              <a:rPr lang="en-US"/>
               <a:t>Second level</a:t>
             </a:r>
           </a:p>
           <a:p>
             <a:pPr lvl="2"/>
             <a:r>
-              <a:rPr lang="en-US" smtClean="0"/>
+              <a:rPr lang="en-US"/>
               <a:t>Third level</a:t>
             </a:r>
           </a:p>
           <a:p>
             <a:pPr lvl="3"/>
             <a:r>
-              <a:rPr lang="en-US" smtClean="0"/>
+              <a:rPr lang="en-US"/>
               <a:t>Fourth level</a:t>
             </a:r>
           </a:p>
           <a:p>
             <a:pPr lvl="4"/>
             <a:r>
-              <a:rPr lang="en-US" smtClean="0"/>
+              <a:rPr lang="en-US"/>
               <a:t>Fifth level</a:t>
             </a:r>
-            <a:endParaRPr lang="en-US"/>
           </a:p>
         </p:txBody>
       </p:sp>
@@ -2231,7 +2715,7 @@
           <a:p>
             <a:pPr lvl="0"/>
             <a:r>
-              <a:rPr lang="en-US" smtClean="0"/>
+              <a:rPr lang="en-US"/>
               <a:t>Click to edit Master text styles</a:t>
             </a:r>
           </a:p>
@@ -2254,7 +2738,7 @@
           <a:p>
             <a:fld id="{5BCAD085-E8A6-8845-BD4E-CB4CCA059FC4}" type="datetimeFigureOut">
               <a:rPr lang="en-US" smtClean="0"/>
-              <a:t>1/27/13</a:t>
+              <a:t>10/22/2026</a:t>
             </a:fld>
             <a:endParaRPr lang="en-US"/>
           </a:p>
@@ -2357,10 +2841,9 @@
           </a:lstStyle>
           <a:p>
             <a:r>
-              <a:rPr lang="en-US" smtClean="0"/>
+              <a:rPr lang="en-US"/>
               <a:t>Click to edit Master title style</a:t>
             </a:r>
-            <a:endParaRPr lang="en-US"/>
           </a:p>
         </p:txBody>
       </p:sp>
@@ -2484,7 +2967,7 @@
           <a:p>
             <a:pPr lvl="0"/>
             <a:r>
-              <a:rPr lang="en-US" smtClean="0"/>
+              <a:rPr lang="en-US"/>
               <a:t>Click to edit Master text styles</a:t>
             </a:r>
           </a:p>
@@ -2507,7 +2990,7 @@
           <a:p>
             <a:fld id="{5BCAD085-E8A6-8845-BD4E-CB4CCA059FC4}" type="datetimeFigureOut">
               <a:rPr lang="en-US" smtClean="0"/>
-              <a:t>1/27/13</a:t>
+              <a:t>10/22/2026</a:t>
             </a:fld>
             <a:endParaRPr lang="en-US"/>
           </a:p>
@@ -2616,10 +3099,9 @@
           <a:lstStyle/>
           <a:p>
             <a:r>
-              <a:rPr lang="en-US" smtClean="0"/>
+              <a:rPr lang="en-US"/>
               <a:t>Click to edit Master title style</a:t>
             </a:r>
-            <a:endParaRPr lang="en-US"/>
           </a:p>
         </p:txBody>
       </p:sp>
@@ -2650,38 +3132,37 @@
           <a:p>
             <a:pPr lvl="0"/>
             <a:r>
-              <a:rPr lang="en-US" smtClean="0"/>
+              <a:rPr lang="en-US"/>
               <a:t>Click to edit Master text styles</a:t>
             </a:r>
           </a:p>
           <a:p>
             <a:pPr lvl="1"/>
             <a:r>
-              <a:rPr lang="en-US" smtClean="0"/>
+              <a:rPr lang="en-US"/>
               <a:t>Second level</a:t>
             </a:r>
           </a:p>
           <a:p>
             <a:pPr lvl="2"/>
             <a:r>
-              <a:rPr lang="en-US" smtClean="0"/>
+              <a:rPr lang="en-US"/>
               <a:t>Third level</a:t>
             </a:r>
           </a:p>
           <a:p>
             <a:pPr lvl="3"/>
             <a:r>
-              <a:rPr lang="en-US" smtClean="0"/>
+              <a:rPr lang="en-US"/>
               <a:t>Fourth level</a:t>
             </a:r>
           </a:p>
           <a:p>
             <a:pPr lvl="4"/>
             <a:r>
-              <a:rPr lang="en-US" smtClean="0"/>
+              <a:rPr lang="en-US"/>
               <a:t>Fifth level</a:t>
             </a:r>
-            <a:endParaRPr lang="en-US"/>
           </a:p>
         </p:txBody>
       </p:sp>
@@ -2720,7 +3201,7 @@
           <a:p>
             <a:fld id="{5BCAD085-E8A6-8845-BD4E-CB4CCA059FC4}" type="datetimeFigureOut">
               <a:rPr lang="en-US" smtClean="0"/>
-              <a:t>1/27/13</a:t>
+              <a:t>10/22/2026</a:t>
             </a:fld>
             <a:endParaRPr lang="en-US"/>
           </a:p>
@@ -3079,7 +3560,7 @@
 </file>
 
 <file path=ppt/slides/slide1.xml><?xml version="1.0" encoding="utf-8"?>
-<p:sld xmlns:a="http://schemas.openxmlformats.org/drawingml/2006/main" xmlns:p="http://schemas.openxmlformats.org/presentationml/2006/main" xmlns:r="http://schemas.openxmlformats.org/officeDocument/2006/relationships">
+<p:sld xmlns:a="http://schemas.openxmlformats.org/drawingml/2006/main" xmlns:r="http://schemas.openxmlformats.org/officeDocument/2006/relationships" xmlns:p="http://schemas.openxmlformats.org/presentationml/2006/main">
   <p:cSld>
     <p:spTree>
       <p:nvGrpSpPr>
@@ -3087,7 +3568,14 @@
         <p:cNvGrpSpPr/>
         <p:nvPr/>
       </p:nvGrpSpPr>
-      <p:grpSpPr/>
+      <p:grpSpPr>
+        <a:xfrm>
+          <a:off x="0" y="0"/>
+          <a:ext cx="0" cy="0"/>
+          <a:chOff x="0" y="0"/>
+          <a:chExt cx="0" cy="0"/>
+        </a:xfrm>
+      </p:grpSpPr>
       <p:sp>
         <p:nvSpPr>
           <p:cNvPr id="2" name="TextBox 1"/>
@@ -3105,7 +3593,7 @@
           <a:noFill/>
         </p:spPr>
         <p:txBody>
-          <a:bodyPr wrap="square" lIns="0" rIns="0" tIns="0" bIns="0">
+          <a:bodyPr wrap="square" lIns="0" tIns="0" rIns="0" bIns="0">
             <a:spAutoFit/>
           </a:bodyPr>
           <a:lstStyle/>
@@ -3141,7 +3629,7 @@
           <a:noFill/>
         </p:spPr>
         <p:txBody>
-          <a:bodyPr wrap="square" lIns="0" rIns="0" tIns="0" bIns="0">
+          <a:bodyPr wrap="square" lIns="0" tIns="0" rIns="0" bIns="0">
             <a:spAutoFit/>
           </a:bodyPr>
           <a:lstStyle/>
@@ -3199,7 +3687,7 @@
           </a:fontRef>
         </p:style>
         <p:txBody>
-          <a:bodyPr rtlCol="0" anchor="ctr" lIns="0" rIns="0" tIns="0" bIns="0"/>
+          <a:bodyPr lIns="0" tIns="0" rIns="0" bIns="0" rtlCol="0" anchor="ctr"/>
           <a:lstStyle/>
           <a:p>
             <a:pPr algn="ctr"/>
@@ -3255,7 +3743,7 @@
           </a:fontRef>
         </p:style>
         <p:txBody>
-          <a:bodyPr rtlCol="0" anchor="ctr" lIns="0" rIns="0" tIns="0" bIns="0"/>
+          <a:bodyPr lIns="0" tIns="0" rIns="0" bIns="0" rtlCol="0" anchor="ctr"/>
           <a:lstStyle/>
           <a:p>
             <a:pPr algn="ctr"/>
@@ -3311,7 +3799,7 @@
           </a:fontRef>
         </p:style>
         <p:txBody>
-          <a:bodyPr rtlCol="0" anchor="ctr" lIns="0" rIns="0" tIns="0" bIns="0"/>
+          <a:bodyPr lIns="0" tIns="0" rIns="0" bIns="0" rtlCol="0" anchor="ctr"/>
           <a:lstStyle/>
           <a:p>
             <a:pPr algn="ctr"/>
@@ -3367,12 +3855,12 @@
           </a:fontRef>
         </p:style>
         <p:txBody>
-          <a:bodyPr rtlCol="0" anchor="ctr" lIns="0" rIns="0" tIns="0" bIns="0"/>
-          <a:lstStyle/>
-          <a:p>
-            <a:pPr algn="ctr"/>
-            <a:r>
-              <a:rPr sz="800" b="1">
+          <a:bodyPr lIns="0" tIns="0" rIns="0" bIns="0" rtlCol="0" anchor="ctr"/>
+          <a:lstStyle/>
+          <a:p>
+            <a:pPr algn="ctr"/>
+            <a:r>
+              <a:rPr sz="800" b="1" dirty="0" err="1">
                 <a:solidFill>
                   <a:srgbClr val="FFFFFF"/>
                 </a:solidFill>
@@ -3381,6 +3869,13 @@
               </a:rPr>
               <a:t>出力换算</a:t>
             </a:r>
+            <a:endParaRPr sz="800" b="1" dirty="0">
+              <a:solidFill>
+                <a:srgbClr val="FFFFFF"/>
+              </a:solidFill>
+              <a:latin typeface="Microsoft YaHei"/>
+              <a:ea typeface="Microsoft YaHei"/>
+            </a:endParaRPr>
           </a:p>
         </p:txBody>
       </p:sp>
@@ -3423,7 +3918,7 @@
           </a:fontRef>
         </p:style>
         <p:txBody>
-          <a:bodyPr rtlCol="0" anchor="ctr" lIns="0" rIns="0" tIns="0" bIns="0"/>
+          <a:bodyPr lIns="0" tIns="0" rIns="0" bIns="0" rtlCol="0" anchor="ctr"/>
           <a:lstStyle/>
           <a:p>
             <a:pPr algn="ctr"/>
@@ -3479,7 +3974,7 @@
           </a:fontRef>
         </p:style>
         <p:txBody>
-          <a:bodyPr rtlCol="0" anchor="ctr" wrap="square" lIns="27432" rIns="27432" tIns="9144" bIns="9144"/>
+          <a:bodyPr wrap="square" lIns="27432" tIns="9144" rIns="27432" bIns="9144" rtlCol="0" anchor="ctr"/>
           <a:lstStyle/>
           <a:p>
             <a:pPr algn="ctr"/>
@@ -3561,25 +4056,35 @@
           </a:fontRef>
         </p:style>
         <p:txBody>
-          <a:bodyPr rtlCol="0" anchor="ctr" wrap="square" lIns="27432" rIns="27432" tIns="9144" bIns="9144"/>
-          <a:lstStyle/>
-          <a:p>
-            <a:pPr algn="ctr"/>
-            <a:r>
-              <a:rPr sz="730" b="1">
+          <a:bodyPr wrap="square" lIns="27432" tIns="9144" rIns="27432" bIns="9144" rtlCol="0" anchor="ctr"/>
+          <a:lstStyle/>
+          <a:p>
+            <a:pPr algn="ctr"/>
+            <a:r>
+              <a:rPr sz="730" b="1" dirty="0" err="1">
                 <a:solidFill>
                   <a:srgbClr val="2E5E9E"/>
                 </a:solidFill>
                 <a:latin typeface="Microsoft YaHei"/>
                 <a:ea typeface="Microsoft YaHei"/>
               </a:rPr>
-              <a:t>风NC 76个年文件</a:t>
-            </a:r>
-          </a:p>
-          <a:p>
-            <a:pPr algn="ctr"/>
-            <a:r>
-              <a:rPr sz="570" b="0">
+              <a:t>风NC</a:t>
+            </a:r>
+            <a:r>
+              <a:rPr sz="730" b="1" dirty="0">
+                <a:solidFill>
+                  <a:srgbClr val="2E5E9E"/>
+                </a:solidFill>
+                <a:latin typeface="Microsoft YaHei"/>
+                <a:ea typeface="Microsoft YaHei"/>
+              </a:rPr>
+              <a:t> 76个年文件</a:t>
+            </a:r>
+          </a:p>
+          <a:p>
+            <a:pPr algn="ctr"/>
+            <a:r>
+              <a:rPr sz="570" b="0" dirty="0">
                 <a:solidFill>
                   <a:srgbClr val="333333"/>
                 </a:solidFill>
@@ -3631,7 +4136,7 @@
           </a:fontRef>
         </p:style>
         <p:txBody>
-          <a:bodyPr rtlCol="0" anchor="ctr" wrap="square" lIns="27432" rIns="27432" tIns="9144" bIns="9144"/>
+          <a:bodyPr wrap="square" lIns="27432" tIns="9144" rIns="27432" bIns="9144" rtlCol="0" anchor="ctr"/>
           <a:lstStyle/>
           <a:p>
             <a:pPr algn="ctr"/>
@@ -3739,7 +4244,7 @@
           </a:fontRef>
         </p:style>
         <p:txBody>
-          <a:bodyPr rtlCol="0" anchor="ctr" wrap="square" lIns="27432" rIns="27432" tIns="9144" bIns="9144"/>
+          <a:bodyPr wrap="square" lIns="27432" tIns="9144" rIns="27432" bIns="9144" rtlCol="0" anchor="ctr"/>
           <a:lstStyle/>
           <a:p>
             <a:pPr algn="ctr"/>
@@ -3834,12 +4339,12 @@
           </a:fontRef>
         </p:style>
         <p:txBody>
-          <a:bodyPr rtlCol="0" anchor="ctr" wrap="square" lIns="27432" rIns="27432" tIns="9144" bIns="9144"/>
-          <a:lstStyle/>
-          <a:p>
-            <a:pPr algn="ctr"/>
-            <a:r>
-              <a:rPr sz="700" b="1">
+          <a:bodyPr wrap="square" lIns="27432" tIns="9144" rIns="27432" bIns="9144" rtlCol="0" anchor="ctr"/>
+          <a:lstStyle/>
+          <a:p>
+            <a:pPr algn="ctr"/>
+            <a:r>
+              <a:rPr sz="700" b="1" dirty="0">
                 <a:solidFill>
                   <a:srgbClr val="1F7A5C"/>
                 </a:solidFill>
@@ -3852,33 +4357,43 @@
           <a:p>
             <a:pPr algn="ctr"/>
             <a:r>
-              <a:rPr sz="570" b="0">
+              <a:rPr sz="570" b="0" dirty="0" err="1">
                 <a:solidFill>
                   <a:srgbClr val="333333"/>
                 </a:solidFill>
                 <a:latin typeface="Microsoft YaHei"/>
                 <a:ea typeface="Microsoft YaHei"/>
               </a:rPr>
-              <a:t>hypot(u100,v100)→(8760,80)</a:t>
-            </a:r>
-          </a:p>
-          <a:p>
-            <a:pPr algn="ctr"/>
-            <a:r>
-              <a:rPr sz="570" b="0">
+              <a:t>hypot</a:t>
+            </a:r>
+            <a:r>
+              <a:rPr sz="570" b="0" dirty="0">
                 <a:solidFill>
                   <a:srgbClr val="333333"/>
                 </a:solidFill>
                 <a:latin typeface="Microsoft YaHei"/>
                 <a:ea typeface="Microsoft YaHei"/>
               </a:rPr>
+              <a:t>(u100,v100)→(8760,80)</a:t>
+            </a:r>
+          </a:p>
+          <a:p>
+            <a:pPr algn="ctr"/>
+            <a:r>
+              <a:rPr sz="570" b="0" dirty="0">
+                <a:solidFill>
+                  <a:srgbClr val="333333"/>
+                </a:solidFill>
+                <a:latin typeface="Microsoft YaHei"/>
+                <a:ea typeface="Microsoft YaHei"/>
+              </a:rPr>
               <a:t>海31格/陆49格等权均值</a:t>
             </a:r>
           </a:p>
           <a:p>
             <a:pPr algn="ctr"/>
             <a:r>
-              <a:rPr sz="570" b="0">
+              <a:rPr sz="570" b="0" dirty="0">
                 <a:solidFill>
                   <a:srgbClr val="333333"/>
                 </a:solidFill>
@@ -3891,7 +4406,7 @@
           <a:p>
             <a:pPr algn="ctr"/>
             <a:r>
-              <a:rPr sz="570" b="0">
+              <a:rPr sz="570" b="0" dirty="0">
                 <a:solidFill>
                   <a:srgbClr val="333333"/>
                 </a:solidFill>
@@ -3942,25 +4457,45 @@
           </a:fontRef>
         </p:style>
         <p:txBody>
-          <a:bodyPr rtlCol="0" anchor="ctr" wrap="square" lIns="27432" rIns="27432" tIns="9144" bIns="9144"/>
-          <a:lstStyle/>
-          <a:p>
-            <a:pPr algn="ctr"/>
-            <a:r>
-              <a:rPr sz="700" b="1">
+          <a:bodyPr wrap="square" lIns="27432" tIns="9144" rIns="27432" bIns="9144" rtlCol="0" anchor="ctr"/>
+          <a:lstStyle/>
+          <a:p>
+            <a:pPr algn="ctr"/>
+            <a:r>
+              <a:rPr sz="700" b="1" dirty="0">
                 <a:solidFill>
                   <a:srgbClr val="1F7A5C"/>
                 </a:solidFill>
                 <a:latin typeface="Microsoft YaHei"/>
                 <a:ea typeface="Microsoft YaHei"/>
               </a:rPr>
-              <a:t>01.main 存NPZ ＋ 02.load_cache</a:t>
-            </a:r>
-          </a:p>
-          <a:p>
-            <a:pPr algn="ctr"/>
-            <a:r>
-              <a:rPr sz="570" b="0">
+              <a:t>01.main </a:t>
+            </a:r>
+            <a:r>
+              <a:rPr sz="700" b="1" dirty="0" err="1">
+                <a:solidFill>
+                  <a:srgbClr val="1F7A5C"/>
+                </a:solidFill>
+                <a:latin typeface="Microsoft YaHei"/>
+                <a:ea typeface="Microsoft YaHei"/>
+              </a:rPr>
+              <a:t>存NPZ</a:t>
+            </a:r>
+            <a:r>
+              <a:rPr sz="700" b="1" dirty="0">
+                <a:solidFill>
+                  <a:srgbClr val="1F7A5C"/>
+                </a:solidFill>
+                <a:latin typeface="Microsoft YaHei"/>
+                <a:ea typeface="Microsoft YaHei"/>
+              </a:rPr>
+              <a:t> ＋ 02.load_cache</a:t>
+            </a:r>
+          </a:p>
+          <a:p>
+            <a:pPr algn="ctr"/>
+            <a:r>
+              <a:rPr sz="570" b="0" dirty="0">
                 <a:solidFill>
                   <a:srgbClr val="333333"/>
                 </a:solidFill>
@@ -3973,7 +4508,7 @@
           <a:p>
             <a:pPr algn="ctr"/>
             <a:r>
-              <a:rPr sz="570" b="0">
+              <a:rPr sz="570" b="0" dirty="0">
                 <a:solidFill>
                   <a:srgbClr val="333333"/>
                 </a:solidFill>
@@ -3986,27 +4521,97 @@
           <a:p>
             <a:pPr algn="ctr"/>
             <a:r>
-              <a:rPr sz="570" b="0">
+              <a:rPr sz="570" b="0" dirty="0">
                 <a:solidFill>
                   <a:srgbClr val="333333"/>
                 </a:solidFill>
                 <a:latin typeface="Microsoft YaHei"/>
                 <a:ea typeface="Microsoft YaHei"/>
               </a:rPr>
-              <a:t>→ 海风/陆风/光各 (76,8760)</a:t>
-            </a:r>
-          </a:p>
-          <a:p>
-            <a:pPr algn="ctr"/>
-            <a:r>
-              <a:rPr sz="570" b="0">
+              <a:t>→ </a:t>
+            </a:r>
+            <a:r>
+              <a:rPr sz="570" b="0" dirty="0" err="1">
                 <a:solidFill>
                   <a:srgbClr val="333333"/>
                 </a:solidFill>
                 <a:latin typeface="Microsoft YaHei"/>
                 <a:ea typeface="Microsoft YaHei"/>
               </a:rPr>
-              <a:t>光负噪声≥−0.01截为0</a:t>
+              <a:t>海风</a:t>
+            </a:r>
+            <a:r>
+              <a:rPr sz="570" b="0" dirty="0">
+                <a:solidFill>
+                  <a:srgbClr val="333333"/>
+                </a:solidFill>
+                <a:latin typeface="Microsoft YaHei"/>
+                <a:ea typeface="Microsoft YaHei"/>
+              </a:rPr>
+              <a:t>/</a:t>
+            </a:r>
+            <a:r>
+              <a:rPr sz="570" b="0" dirty="0" err="1">
+                <a:solidFill>
+                  <a:srgbClr val="333333"/>
+                </a:solidFill>
+                <a:latin typeface="Microsoft YaHei"/>
+                <a:ea typeface="Microsoft YaHei"/>
+              </a:rPr>
+              <a:t>陆风</a:t>
+            </a:r>
+            <a:r>
+              <a:rPr sz="570" b="0" dirty="0">
+                <a:solidFill>
+                  <a:srgbClr val="333333"/>
+                </a:solidFill>
+                <a:latin typeface="Microsoft YaHei"/>
+                <a:ea typeface="Microsoft YaHei"/>
+              </a:rPr>
+              <a:t>/</a:t>
+            </a:r>
+            <a:r>
+              <a:rPr sz="570" b="0" dirty="0" err="1">
+                <a:solidFill>
+                  <a:srgbClr val="333333"/>
+                </a:solidFill>
+                <a:latin typeface="Microsoft YaHei"/>
+                <a:ea typeface="Microsoft YaHei"/>
+              </a:rPr>
+              <a:t>光各</a:t>
+            </a:r>
+            <a:r>
+              <a:rPr sz="570" b="0" dirty="0">
+                <a:solidFill>
+                  <a:srgbClr val="333333"/>
+                </a:solidFill>
+                <a:latin typeface="Microsoft YaHei"/>
+                <a:ea typeface="Microsoft YaHei"/>
+              </a:rPr>
+              <a:t> (76,8760)</a:t>
+            </a:r>
+          </a:p>
+          <a:p>
+            <a:pPr algn="ctr"/>
+            <a:r>
+              <a:rPr sz="570" b="0" dirty="0" err="1">
+                <a:solidFill>
+                  <a:srgbClr val="333333"/>
+                </a:solidFill>
+                <a:latin typeface="Microsoft YaHei"/>
+                <a:ea typeface="Microsoft YaHei"/>
+              </a:rPr>
+              <a:t>光负噪声</a:t>
+            </a:r>
+            <a:r>
+              <a:rPr sz="570" b="0" dirty="0">
+                <a:solidFill>
+                  <a:srgbClr val="333333"/>
+                </a:solidFill>
+                <a:latin typeface="Microsoft YaHei"/>
+                <a:ea typeface="Microsoft YaHei"/>
+              </a:rPr>
+              <a:t>≥−0.01截为0</a:t>
             </a:r>
           </a:p>
         </p:txBody>
@@ -4198,7 +4803,7 @@
           </a:fontRef>
         </p:style>
         <p:txBody>
-          <a:bodyPr rtlCol="0" anchor="ctr" wrap="square" lIns="27432" rIns="27432" tIns="9144" bIns="9144"/>
+          <a:bodyPr wrap="square" lIns="27432" tIns="9144" rIns="27432" bIns="9144" rtlCol="0" anchor="ctr"/>
           <a:lstStyle/>
           <a:p>
             <a:pPr algn="ctr"/>
@@ -4280,25 +4885,35 @@
           </a:fontRef>
         </p:style>
         <p:txBody>
-          <a:bodyPr rtlCol="0" anchor="ctr" wrap="square" lIns="27432" rIns="27432" tIns="9144" bIns="9144"/>
-          <a:lstStyle/>
-          <a:p>
-            <a:pPr algn="ctr"/>
-            <a:r>
-              <a:rPr sz="630" b="1">
+          <a:bodyPr wrap="square" lIns="27432" tIns="9144" rIns="27432" bIns="9144" rtlCol="0" anchor="ctr"/>
+          <a:lstStyle/>
+          <a:p>
+            <a:pPr algn="ctr"/>
+            <a:r>
+              <a:rPr sz="630" b="1" dirty="0" err="1">
                 <a:solidFill>
                   <a:srgbClr val="B07A1F"/>
                 </a:solidFill>
                 <a:latin typeface="Microsoft YaHei"/>
                 <a:ea typeface="Microsoft YaHei"/>
               </a:rPr>
-              <a:t>海风库 ×3</a:t>
-            </a:r>
-          </a:p>
-          <a:p>
-            <a:pPr algn="ctr"/>
-            <a:r>
-              <a:rPr sz="520" b="0">
+              <a:t>海风库</a:t>
+            </a:r>
+            <a:r>
+              <a:rPr sz="630" b="1" dirty="0">
+                <a:solidFill>
+                  <a:srgbClr val="B07A1F"/>
+                </a:solidFill>
+                <a:latin typeface="Microsoft YaHei"/>
+                <a:ea typeface="Microsoft YaHei"/>
+              </a:rPr>
+              <a:t> ×3</a:t>
+            </a:r>
+          </a:p>
+          <a:p>
+            <a:pPr algn="ctr"/>
+            <a:r>
+              <a:rPr sz="520" b="0" dirty="0">
                 <a:solidFill>
                   <a:srgbClr val="333333"/>
                 </a:solidFill>
@@ -4311,33 +4926,50 @@
           <a:p>
             <a:pPr algn="ctr"/>
             <a:r>
-              <a:rPr sz="520" b="0">
+              <a:rPr sz="520" b="0" dirty="0">
                 <a:solidFill>
                   <a:srgbClr val="333333"/>
                 </a:solidFill>
                 <a:latin typeface="Microsoft YaHei"/>
                 <a:ea typeface="Microsoft YaHei"/>
               </a:rPr>
-              <a:t>medoid → 真实代表年</a:t>
-            </a:r>
-          </a:p>
-          <a:p>
-            <a:pPr algn="ctr"/>
-            <a:r>
-              <a:rPr sz="520" b="0">
+              <a:t>medoid → </a:t>
+            </a:r>
+            <a:r>
+              <a:rPr sz="520" b="0" dirty="0" err="1">
                 <a:solidFill>
                   <a:srgbClr val="333333"/>
                 </a:solidFill>
                 <a:latin typeface="Microsoft YaHei"/>
                 <a:ea typeface="Microsoft YaHei"/>
               </a:rPr>
+              <a:t>真实代表年</a:t>
+            </a:r>
+            <a:endParaRPr sz="520" b="0" dirty="0">
+              <a:solidFill>
+                <a:srgbClr val="333333"/>
+              </a:solidFill>
+              <a:latin typeface="Microsoft YaHei"/>
+              <a:ea typeface="Microsoft YaHei"/>
+            </a:endParaRPr>
+          </a:p>
+          <a:p>
+            <a:pPr algn="ctr"/>
+            <a:r>
+              <a:rPr sz="520" b="0" dirty="0">
+                <a:solidFill>
+                  <a:srgbClr val="333333"/>
+                </a:solidFill>
+                <a:latin typeface="Microsoft YaHei"/>
+                <a:ea typeface="Microsoft YaHei"/>
+              </a:rPr>
               <a:t>before (8760,)</a:t>
             </a:r>
           </a:p>
           <a:p>
             <a:pPr algn="ctr"/>
             <a:r>
-              <a:rPr sz="520" b="0">
+              <a:rPr sz="520" b="0" dirty="0" err="1">
                 <a:solidFill>
                   <a:srgbClr val="333333"/>
                 </a:solidFill>
@@ -4346,37 +4978,68 @@
               </a:rPr>
               <a:t>insert_wind</a:t>
             </a:r>
-          </a:p>
-          <a:p>
-            <a:pPr algn="ctr"/>
-            <a:r>
-              <a:rPr sz="520" b="0">
+            <a:endParaRPr sz="520" b="0" dirty="0">
+              <a:solidFill>
+                <a:srgbClr val="333333"/>
+              </a:solidFill>
+              <a:latin typeface="Microsoft YaHei"/>
+              <a:ea typeface="Microsoft YaHei"/>
+            </a:endParaRPr>
+          </a:p>
+          <a:p>
+            <a:pPr algn="ctr"/>
+            <a:r>
+              <a:rPr sz="520" b="0" dirty="0">
                 <a:solidFill>
                   <a:srgbClr val="333333"/>
                 </a:solidFill>
                 <a:latin typeface="Microsoft YaHei"/>
                 <a:ea typeface="Microsoft YaHei"/>
               </a:rPr>
-              <a:t>q10/q90 → 候选池</a:t>
-            </a:r>
-          </a:p>
-          <a:p>
-            <a:pPr algn="ctr"/>
-            <a:r>
-              <a:rPr sz="520" b="0">
+              <a:t>q10/q90 → </a:t>
+            </a:r>
+            <a:r>
+              <a:rPr sz="520" b="0" dirty="0" err="1">
                 <a:solidFill>
                   <a:srgbClr val="333333"/>
                 </a:solidFill>
                 <a:latin typeface="Microsoft YaHei"/>
                 <a:ea typeface="Microsoft YaHei"/>
               </a:rPr>
+              <a:t>候选池</a:t>
+            </a:r>
+            <a:endParaRPr sz="520" b="0" dirty="0">
+              <a:solidFill>
+                <a:srgbClr val="333333"/>
+              </a:solidFill>
+              <a:latin typeface="Microsoft YaHei"/>
+              <a:ea typeface="Microsoft YaHei"/>
+            </a:endParaRPr>
+          </a:p>
+          <a:p>
+            <a:pPr algn="ctr"/>
+            <a:r>
+              <a:rPr sz="520" b="0" dirty="0" err="1">
+                <a:solidFill>
+                  <a:srgbClr val="333333"/>
+                </a:solidFill>
+                <a:latin typeface="Microsoft YaHei"/>
+                <a:ea typeface="Microsoft YaHei"/>
+              </a:rPr>
               <a:t>逐月批次插入</a:t>
             </a:r>
-          </a:p>
-          <a:p>
-            <a:pPr algn="ctr"/>
-            <a:r>
-              <a:rPr sz="520" b="0">
+            <a:endParaRPr sz="520" b="0" dirty="0">
+              <a:solidFill>
+                <a:srgbClr val="333333"/>
+              </a:solidFill>
+              <a:latin typeface="Microsoft YaHei"/>
+              <a:ea typeface="Microsoft YaHei"/>
+            </a:endParaRPr>
+          </a:p>
+          <a:p>
+            <a:pPr algn="ctr"/>
+            <a:r>
+              <a:rPr sz="520" b="0" dirty="0">
                 <a:solidFill>
                   <a:srgbClr val="333333"/>
                 </a:solidFill>
@@ -4501,25 +5164,35 @@
           </a:fontRef>
         </p:style>
         <p:txBody>
-          <a:bodyPr rtlCol="0" anchor="ctr" wrap="square" lIns="27432" rIns="27432" tIns="9144" bIns="9144"/>
-          <a:lstStyle/>
-          <a:p>
-            <a:pPr algn="ctr"/>
-            <a:r>
-              <a:rPr sz="630" b="1">
+          <a:bodyPr wrap="square" lIns="27432" tIns="9144" rIns="27432" bIns="9144" rtlCol="0" anchor="ctr"/>
+          <a:lstStyle/>
+          <a:p>
+            <a:pPr algn="ctr"/>
+            <a:r>
+              <a:rPr sz="630" b="1" dirty="0" err="1">
                 <a:solidFill>
                   <a:srgbClr val="B07A1F"/>
                 </a:solidFill>
                 <a:latin typeface="Microsoft YaHei"/>
                 <a:ea typeface="Microsoft YaHei"/>
               </a:rPr>
-              <a:t>陆风库 ×3</a:t>
-            </a:r>
-          </a:p>
-          <a:p>
-            <a:pPr algn="ctr"/>
-            <a:r>
-              <a:rPr sz="520" b="0">
+              <a:t>陆风库</a:t>
+            </a:r>
+            <a:r>
+              <a:rPr sz="630" b="1" dirty="0">
+                <a:solidFill>
+                  <a:srgbClr val="B07A1F"/>
+                </a:solidFill>
+                <a:latin typeface="Microsoft YaHei"/>
+                <a:ea typeface="Microsoft YaHei"/>
+              </a:rPr>
+              <a:t> ×3</a:t>
+            </a:r>
+          </a:p>
+          <a:p>
+            <a:pPr algn="ctr"/>
+            <a:r>
+              <a:rPr sz="520" b="0" dirty="0">
                 <a:solidFill>
                   <a:srgbClr val="333333"/>
                 </a:solidFill>
@@ -4532,33 +5205,50 @@
           <a:p>
             <a:pPr algn="ctr"/>
             <a:r>
-              <a:rPr sz="520" b="0">
+              <a:rPr sz="520" b="0" dirty="0">
                 <a:solidFill>
                   <a:srgbClr val="333333"/>
                 </a:solidFill>
                 <a:latin typeface="Microsoft YaHei"/>
                 <a:ea typeface="Microsoft YaHei"/>
               </a:rPr>
-              <a:t>medoid → 真实代表年</a:t>
-            </a:r>
-          </a:p>
-          <a:p>
-            <a:pPr algn="ctr"/>
-            <a:r>
-              <a:rPr sz="520" b="0">
+              <a:t>medoid → </a:t>
+            </a:r>
+            <a:r>
+              <a:rPr sz="520" b="0" dirty="0" err="1">
                 <a:solidFill>
                   <a:srgbClr val="333333"/>
                 </a:solidFill>
                 <a:latin typeface="Microsoft YaHei"/>
                 <a:ea typeface="Microsoft YaHei"/>
               </a:rPr>
+              <a:t>真实代表年</a:t>
+            </a:r>
+            <a:endParaRPr sz="520" b="0" dirty="0">
+              <a:solidFill>
+                <a:srgbClr val="333333"/>
+              </a:solidFill>
+              <a:latin typeface="Microsoft YaHei"/>
+              <a:ea typeface="Microsoft YaHei"/>
+            </a:endParaRPr>
+          </a:p>
+          <a:p>
+            <a:pPr algn="ctr"/>
+            <a:r>
+              <a:rPr sz="520" b="0" dirty="0">
+                <a:solidFill>
+                  <a:srgbClr val="333333"/>
+                </a:solidFill>
+                <a:latin typeface="Microsoft YaHei"/>
+                <a:ea typeface="Microsoft YaHei"/>
+              </a:rPr>
               <a:t>before (8760,)</a:t>
             </a:r>
           </a:p>
           <a:p>
             <a:pPr algn="ctr"/>
             <a:r>
-              <a:rPr sz="520" b="0">
+              <a:rPr sz="520" b="0" dirty="0" err="1">
                 <a:solidFill>
                   <a:srgbClr val="333333"/>
                 </a:solidFill>
@@ -4567,37 +5257,68 @@
               </a:rPr>
               <a:t>insert_wind</a:t>
             </a:r>
-          </a:p>
-          <a:p>
-            <a:pPr algn="ctr"/>
-            <a:r>
-              <a:rPr sz="520" b="0">
+            <a:endParaRPr sz="520" b="0" dirty="0">
+              <a:solidFill>
+                <a:srgbClr val="333333"/>
+              </a:solidFill>
+              <a:latin typeface="Microsoft YaHei"/>
+              <a:ea typeface="Microsoft YaHei"/>
+            </a:endParaRPr>
+          </a:p>
+          <a:p>
+            <a:pPr algn="ctr"/>
+            <a:r>
+              <a:rPr sz="520" b="0" dirty="0">
                 <a:solidFill>
                   <a:srgbClr val="333333"/>
                 </a:solidFill>
                 <a:latin typeface="Microsoft YaHei"/>
                 <a:ea typeface="Microsoft YaHei"/>
               </a:rPr>
-              <a:t>q10/q90 → 候选池</a:t>
-            </a:r>
-          </a:p>
-          <a:p>
-            <a:pPr algn="ctr"/>
-            <a:r>
-              <a:rPr sz="520" b="0">
+              <a:t>q10/q90 → </a:t>
+            </a:r>
+            <a:r>
+              <a:rPr sz="520" b="0" dirty="0" err="1">
                 <a:solidFill>
                   <a:srgbClr val="333333"/>
                 </a:solidFill>
                 <a:latin typeface="Microsoft YaHei"/>
                 <a:ea typeface="Microsoft YaHei"/>
               </a:rPr>
+              <a:t>候选池</a:t>
+            </a:r>
+            <a:endParaRPr sz="520" b="0" dirty="0">
+              <a:solidFill>
+                <a:srgbClr val="333333"/>
+              </a:solidFill>
+              <a:latin typeface="Microsoft YaHei"/>
+              <a:ea typeface="Microsoft YaHei"/>
+            </a:endParaRPr>
+          </a:p>
+          <a:p>
+            <a:pPr algn="ctr"/>
+            <a:r>
+              <a:rPr sz="520" b="0" dirty="0" err="1">
+                <a:solidFill>
+                  <a:srgbClr val="333333"/>
+                </a:solidFill>
+                <a:latin typeface="Microsoft YaHei"/>
+                <a:ea typeface="Microsoft YaHei"/>
+              </a:rPr>
               <a:t>逐月批次插入</a:t>
             </a:r>
-          </a:p>
-          <a:p>
-            <a:pPr algn="ctr"/>
-            <a:r>
-              <a:rPr sz="520" b="0">
+            <a:endParaRPr sz="520" b="0" dirty="0">
+              <a:solidFill>
+                <a:srgbClr val="333333"/>
+              </a:solidFill>
+              <a:latin typeface="Microsoft YaHei"/>
+              <a:ea typeface="Microsoft YaHei"/>
+            </a:endParaRPr>
+          </a:p>
+          <a:p>
+            <a:pPr algn="ctr"/>
+            <a:r>
+              <a:rPr sz="520" b="0" dirty="0">
                 <a:solidFill>
                   <a:srgbClr val="333333"/>
                 </a:solidFill>
@@ -4722,7 +5443,7 @@
           </a:fontRef>
         </p:style>
         <p:txBody>
-          <a:bodyPr rtlCol="0" anchor="ctr" wrap="square" lIns="27432" rIns="27432" tIns="9144" bIns="9144"/>
+          <a:bodyPr wrap="square" lIns="27432" tIns="9144" rIns="27432" bIns="9144" rtlCol="0" anchor="ctr"/>
           <a:lstStyle/>
           <a:p>
             <a:pPr algn="ctr"/>
@@ -4943,7 +5664,7 @@
           </a:fontRef>
         </p:style>
         <p:txBody>
-          <a:bodyPr rtlCol="0" anchor="ctr" wrap="square" lIns="27432" rIns="27432" tIns="9144" bIns="9144"/>
+          <a:bodyPr wrap="square" lIns="27432" tIns="9144" rIns="27432" bIns="9144" rtlCol="0" anchor="ctr"/>
           <a:lstStyle/>
           <a:p>
             <a:pPr algn="ctr"/>
@@ -5025,12 +5746,12 @@
           </a:fontRef>
         </p:style>
         <p:txBody>
-          <a:bodyPr rtlCol="0" anchor="ctr" wrap="square" lIns="27432" rIns="27432" tIns="9144" bIns="9144"/>
-          <a:lstStyle/>
-          <a:p>
-            <a:pPr algn="ctr"/>
-            <a:r>
-              <a:rPr sz="700" b="1">
+          <a:bodyPr wrap="square" lIns="27432" tIns="9144" rIns="27432" bIns="9144" rtlCol="0" anchor="ctr"/>
+          <a:lstStyle/>
+          <a:p>
+            <a:pPr algn="ctr"/>
+            <a:r>
+              <a:rPr sz="700" b="1" dirty="0">
                 <a:solidFill>
                   <a:srgbClr val="6C48A8"/>
                 </a:solidFill>
@@ -5043,7 +5764,7 @@
           <a:p>
             <a:pPr algn="ctr"/>
             <a:r>
-              <a:rPr sz="570" b="0">
+              <a:rPr sz="570" b="0" dirty="0">
                 <a:solidFill>
                   <a:srgbClr val="333333"/>
                 </a:solidFill>
@@ -5056,79 +5777,179 @@
           <a:p>
             <a:pPr algn="ctr"/>
             <a:r>
-              <a:rPr sz="570" b="0">
+              <a:rPr sz="570" b="0" dirty="0" err="1">
                 <a:solidFill>
                   <a:srgbClr val="333333"/>
                 </a:solidFill>
                 <a:latin typeface="Microsoft YaHei"/>
                 <a:ea typeface="Microsoft YaHei"/>
               </a:rPr>
-              <a:t>wind_power：</a:t>
-            </a:r>
-          </a:p>
-          <a:p>
-            <a:pPr algn="ctr"/>
-            <a:r>
-              <a:rPr sz="570" b="0">
+              <a:t>wind_power</a:t>
+            </a:r>
+            <a:r>
+              <a:rPr sz="570" b="0" dirty="0">
                 <a:solidFill>
                   <a:srgbClr val="333333"/>
                 </a:solidFill>
                 <a:latin typeface="Microsoft YaHei"/>
                 <a:ea typeface="Microsoft YaHei"/>
               </a:rPr>
-              <a:t>海风 4/11/25 α=0.70</a:t>
-            </a:r>
-          </a:p>
-          <a:p>
-            <a:pPr algn="ctr"/>
-            <a:r>
-              <a:rPr sz="570" b="0">
+              <a:t>：</a:t>
+            </a:r>
+          </a:p>
+          <a:p>
+            <a:pPr algn="ctr"/>
+            <a:r>
+              <a:rPr sz="570" b="0" dirty="0" err="1">
                 <a:solidFill>
                   <a:srgbClr val="333333"/>
                 </a:solidFill>
                 <a:latin typeface="Microsoft YaHei"/>
                 <a:ea typeface="Microsoft YaHei"/>
               </a:rPr>
-              <a:t>陆风 2.5/9/18 α=0.95</a:t>
-            </a:r>
-          </a:p>
-          <a:p>
-            <a:pPr algn="ctr"/>
-            <a:r>
-              <a:rPr sz="570" b="0">
+              <a:t>海风</a:t>
+            </a:r>
+            <a:r>
+              <a:rPr sz="570" b="0" dirty="0">
                 <a:solidFill>
                   <a:srgbClr val="333333"/>
                 </a:solidFill>
                 <a:latin typeface="Microsoft YaHei"/>
                 <a:ea typeface="Microsoft YaHei"/>
               </a:rPr>
-              <a:t>光伏 p=0.6·G/1000</a:t>
-            </a:r>
-          </a:p>
-          <a:p>
-            <a:pPr algn="ctr"/>
-            <a:r>
-              <a:rPr sz="570" b="0">
+              <a:t> 4/11/25 α=0.70</a:t>
+            </a:r>
+          </a:p>
+          <a:p>
+            <a:pPr algn="ctr"/>
+            <a:r>
+              <a:rPr sz="570" b="0" dirty="0" err="1">
                 <a:solidFill>
                   <a:srgbClr val="333333"/>
                 </a:solidFill>
                 <a:latin typeface="Microsoft YaHei"/>
                 <a:ea typeface="Microsoft YaHei"/>
               </a:rPr>
-              <a:t>资源(8760,)→pu(8760,)</a:t>
-            </a:r>
-          </a:p>
-          <a:p>
-            <a:pPr algn="ctr"/>
-            <a:r>
-              <a:rPr sz="570" b="0">
+              <a:t>陆风</a:t>
+            </a:r>
+            <a:r>
+              <a:rPr sz="570" b="0" dirty="0">
                 <a:solidFill>
                   <a:srgbClr val="333333"/>
                 </a:solidFill>
                 <a:latin typeface="Microsoft YaHei"/>
                 <a:ea typeface="Microsoft YaHei"/>
               </a:rPr>
-              <a:t>插前/插后 ×9</a:t>
+              <a:t> 2.5/9/18 α=0.95</a:t>
+            </a:r>
+          </a:p>
+          <a:p>
+            <a:pPr algn="ctr"/>
+            <a:r>
+              <a:rPr sz="570" b="0" dirty="0" err="1">
+                <a:solidFill>
+                  <a:srgbClr val="333333"/>
+                </a:solidFill>
+                <a:latin typeface="Microsoft YaHei"/>
+                <a:ea typeface="Microsoft YaHei"/>
+              </a:rPr>
+              <a:t>光伏</a:t>
+            </a:r>
+            <a:r>
+              <a:rPr sz="570" b="0" dirty="0">
+                <a:solidFill>
+                  <a:srgbClr val="333333"/>
+                </a:solidFill>
+                <a:latin typeface="Microsoft YaHei"/>
+                <a:ea typeface="Microsoft YaHei"/>
+              </a:rPr>
+              <a:t> p=0.6·G/1000</a:t>
+            </a:r>
+          </a:p>
+          <a:p>
+            <a:pPr algn="ctr"/>
+            <a:r>
+              <a:rPr sz="570" b="0" dirty="0" err="1">
+                <a:solidFill>
+                  <a:srgbClr val="333333"/>
+                </a:solidFill>
+                <a:latin typeface="Microsoft YaHei"/>
+                <a:ea typeface="Microsoft YaHei"/>
+              </a:rPr>
+              <a:t>资源</a:t>
+            </a:r>
+            <a:r>
+              <a:rPr sz="570" b="0" dirty="0">
+                <a:solidFill>
+                  <a:srgbClr val="333333"/>
+                </a:solidFill>
+                <a:latin typeface="Microsoft YaHei"/>
+                <a:ea typeface="Microsoft YaHei"/>
+              </a:rPr>
+              <a:t>(8760,)→</a:t>
+            </a:r>
+            <a:r>
+              <a:rPr sz="570" b="0" dirty="0" err="1">
+                <a:solidFill>
+                  <a:srgbClr val="333333"/>
+                </a:solidFill>
+                <a:latin typeface="Microsoft YaHei"/>
+                <a:ea typeface="Microsoft YaHei"/>
+              </a:rPr>
+              <a:t>pu</a:t>
+            </a:r>
+            <a:r>
+              <a:rPr sz="570" b="0" dirty="0">
+                <a:solidFill>
+                  <a:srgbClr val="333333"/>
+                </a:solidFill>
+                <a:latin typeface="Microsoft YaHei"/>
+                <a:ea typeface="Microsoft YaHei"/>
+              </a:rPr>
+              <a:t>(8760,)</a:t>
+            </a:r>
+          </a:p>
+          <a:p>
+            <a:pPr algn="ctr"/>
+            <a:r>
+              <a:rPr sz="570" b="0" dirty="0" err="1">
+                <a:solidFill>
+                  <a:srgbClr val="333333"/>
+                </a:solidFill>
+                <a:latin typeface="Microsoft YaHei"/>
+                <a:ea typeface="Microsoft YaHei"/>
+              </a:rPr>
+              <a:t>插前</a:t>
+            </a:r>
+            <a:r>
+              <a:rPr sz="570" b="0" dirty="0">
+                <a:solidFill>
+                  <a:srgbClr val="333333"/>
+                </a:solidFill>
+                <a:latin typeface="Microsoft YaHei"/>
+                <a:ea typeface="Microsoft YaHei"/>
+              </a:rPr>
+              <a:t>/</a:t>
+            </a:r>
+            <a:r>
+              <a:rPr sz="570" b="0" dirty="0" err="1">
+                <a:solidFill>
+                  <a:srgbClr val="333333"/>
+                </a:solidFill>
+                <a:latin typeface="Microsoft YaHei"/>
+                <a:ea typeface="Microsoft YaHei"/>
+              </a:rPr>
+              <a:t>插后</a:t>
+            </a:r>
+            <a:r>
+              <a:rPr sz="570" b="0" dirty="0">
+                <a:solidFill>
+                  <a:srgbClr val="333333"/>
+                </a:solidFill>
+                <a:latin typeface="Microsoft YaHei"/>
+                <a:ea typeface="Microsoft YaHei"/>
+              </a:rPr>
+              <a:t> ×9</a:t>
             </a:r>
           </a:p>
         </p:txBody>
@@ -5172,7 +5993,7 @@
           </a:fontRef>
         </p:style>
         <p:txBody>
-          <a:bodyPr rtlCol="0" anchor="ctr" wrap="square" lIns="27432" rIns="27432" tIns="9144" bIns="9144"/>
+          <a:bodyPr wrap="square" lIns="27432" tIns="9144" rIns="27432" bIns="9144" rtlCol="0" anchor="ctr"/>
           <a:lstStyle/>
           <a:p>
             <a:pPr algn="ctr"/>
@@ -5241,12 +6062,12 @@
           </a:fontRef>
         </p:style>
         <p:txBody>
-          <a:bodyPr rtlCol="0" anchor="ctr" wrap="square" lIns="27432" rIns="27432" tIns="9144" bIns="9144"/>
-          <a:lstStyle/>
-          <a:p>
-            <a:pPr algn="ctr"/>
-            <a:r>
-              <a:rPr sz="700" b="1">
+          <a:bodyPr wrap="square" lIns="27432" tIns="9144" rIns="27432" bIns="9144" rtlCol="0" anchor="ctr"/>
+          <a:lstStyle/>
+          <a:p>
+            <a:pPr algn="ctr"/>
+            <a:r>
+              <a:rPr sz="700" b="1" dirty="0" err="1">
                 <a:solidFill>
                   <a:srgbClr val="A63A45"/>
                 </a:solidFill>
@@ -5255,18 +6076,45 @@
               </a:rPr>
               <a:t>最大利用小时</a:t>
             </a:r>
-          </a:p>
-          <a:p>
-            <a:pPr algn="ctr"/>
-            <a:r>
-              <a:rPr sz="570" b="0">
+            <a:endParaRPr sz="700" b="1" dirty="0">
+              <a:solidFill>
+                <a:srgbClr val="A63A45"/>
+              </a:solidFill>
+              <a:latin typeface="Microsoft YaHei"/>
+              <a:ea typeface="Microsoft YaHei"/>
+            </a:endParaRPr>
+          </a:p>
+          <a:p>
+            <a:pPr algn="ctr"/>
+            <a:r>
+              <a:rPr sz="570" b="0" dirty="0">
                 <a:solidFill>
                   <a:srgbClr val="333333"/>
                 </a:solidFill>
                 <a:latin typeface="Microsoft YaHei"/>
                 <a:ea typeface="Microsoft YaHei"/>
               </a:rPr>
-              <a:t>H=Σp (9,)</a:t>
+              <a:t>H=</a:t>
+            </a:r>
+            <a:r>
+              <a:rPr sz="570" b="0" dirty="0" err="1">
+                <a:solidFill>
+                  <a:srgbClr val="333333"/>
+                </a:solidFill>
+                <a:latin typeface="Microsoft YaHei"/>
+                <a:ea typeface="Microsoft YaHei"/>
+              </a:rPr>
+              <a:t>Σp</a:t>
+            </a:r>
+            <a:r>
+              <a:rPr sz="570" b="0" dirty="0">
+                <a:solidFill>
+                  <a:srgbClr val="333333"/>
+                </a:solidFill>
+                <a:latin typeface="Microsoft YaHei"/>
+                <a:ea typeface="Microsoft YaHei"/>
+              </a:rPr>
+              <a:t> (9,)</a:t>
             </a:r>
           </a:p>
         </p:txBody>
@@ -5310,7 +6158,7 @@
           </a:fontRef>
         </p:style>
         <p:txBody>
-          <a:bodyPr rtlCol="0" anchor="ctr" wrap="square" lIns="27432" rIns="27432" tIns="9144" bIns="9144"/>
+          <a:bodyPr wrap="square" lIns="27432" tIns="9144" rIns="27432" bIns="9144" rtlCol="0" anchor="ctr"/>
           <a:lstStyle/>
           <a:p>
             <a:pPr algn="ctr"/>
@@ -5392,7 +6240,7 @@
           </a:fontRef>
         </p:style>
         <p:txBody>
-          <a:bodyPr rtlCol="0" anchor="ctr" wrap="square" lIns="27432" rIns="27432" tIns="9144" bIns="9144"/>
+          <a:bodyPr wrap="square" lIns="27432" tIns="9144" rIns="27432" bIns="9144" rtlCol="0" anchor="ctr"/>
           <a:lstStyle/>
           <a:p>
             <a:pPr algn="ctr"/>
@@ -5855,7 +6703,7 @@
           <a:noFill/>
         </p:spPr>
         <p:txBody>
-          <a:bodyPr wrap="square" lIns="0" rIns="0" tIns="0" bIns="0">
+          <a:bodyPr wrap="square" lIns="0" tIns="0" rIns="0" bIns="0">
             <a:spAutoFit/>
           </a:bodyPr>
           <a:lstStyle/>
@@ -5871,6 +6719,1439 @@
               </a:rPr>
               <a:t>风插入：先P10后P90逐月批次，完整片段优先、两侧隔3h、同日至多1条；光插入：月缺口最大优先，低光日整日24h替换 —— 循环细节见 DESIGN.md</a:t>
             </a:r>
+          </a:p>
+        </p:txBody>
+      </p:sp>
+    </p:spTree>
+  </p:cSld>
+  <p:clrMapOvr>
+    <a:masterClrMapping/>
+  </p:clrMapOvr>
+</p:sld>
+</file>
+
+<file path=ppt/slides/slide2.xml><?xml version="1.0" encoding="utf-8"?>
+<p:sld xmlns:a="http://schemas.openxmlformats.org/drawingml/2006/main" xmlns:r="http://schemas.openxmlformats.org/officeDocument/2006/relationships" xmlns:p="http://schemas.openxmlformats.org/presentationml/2006/main">
+  <p:cSld>
+    <p:spTree>
+      <p:nvGrpSpPr>
+        <p:cNvPr id="1" name="Shape 5189"/>
+        <p:cNvGrpSpPr/>
+        <p:nvPr/>
+      </p:nvGrpSpPr>
+      <p:grpSpPr>
+        <a:xfrm>
+          <a:off x="0" y="0"/>
+          <a:ext cx="0" cy="0"/>
+          <a:chOff x="0" y="0"/>
+          <a:chExt cx="0" cy="0"/>
+        </a:xfrm>
+      </p:grpSpPr>
+      <p:sp>
+        <p:nvSpPr>
+          <p:cNvPr id="5190" name="Google Shape;5190;p49"/>
+          <p:cNvSpPr/>
+          <p:nvPr/>
+        </p:nvSpPr>
+        <p:spPr>
+          <a:xfrm>
+            <a:off x="2714633" y="432267"/>
+            <a:ext cx="673600" cy="698000"/>
+          </a:xfrm>
+          <a:prstGeom prst="ellipse">
+            <a:avLst/>
+          </a:prstGeom>
+          <a:solidFill>
+            <a:srgbClr val="C27BA0"/>
+          </a:solidFill>
+          <a:ln w="9525" cap="flat" cmpd="sng">
+            <a:solidFill>
+              <a:schemeClr val="dk2"/>
+            </a:solidFill>
+            <a:prstDash val="solid"/>
+            <a:round/>
+            <a:headEnd type="none" w="sm" len="sm"/>
+            <a:tailEnd type="none" w="sm" len="sm"/>
+          </a:ln>
+        </p:spPr>
+        <p:txBody>
+          <a:bodyPr spcFirstLastPara="1" wrap="square" lIns="121900" tIns="121900" rIns="121900" bIns="121900" anchor="ctr" anchorCtr="0">
+            <a:noAutofit/>
+          </a:bodyPr>
+          <a:lstStyle/>
+          <a:p>
+            <a:endParaRPr sz="2400"/>
+          </a:p>
+        </p:txBody>
+      </p:sp>
+      <p:sp>
+        <p:nvSpPr>
+          <p:cNvPr id="5191" name="Google Shape;5191;p49"/>
+          <p:cNvSpPr/>
+          <p:nvPr/>
+        </p:nvSpPr>
+        <p:spPr>
+          <a:xfrm>
+            <a:off x="2714633" y="1946367"/>
+            <a:ext cx="673600" cy="698000"/>
+          </a:xfrm>
+          <a:prstGeom prst="ellipse">
+            <a:avLst/>
+          </a:prstGeom>
+          <a:solidFill>
+            <a:srgbClr val="C27BA0"/>
+          </a:solidFill>
+          <a:ln w="9525" cap="flat" cmpd="sng">
+            <a:solidFill>
+              <a:schemeClr val="dk2"/>
+            </a:solidFill>
+            <a:prstDash val="solid"/>
+            <a:round/>
+            <a:headEnd type="none" w="sm" len="sm"/>
+            <a:tailEnd type="none" w="sm" len="sm"/>
+          </a:ln>
+        </p:spPr>
+        <p:txBody>
+          <a:bodyPr spcFirstLastPara="1" wrap="square" lIns="121900" tIns="121900" rIns="121900" bIns="121900" anchor="ctr" anchorCtr="0">
+            <a:noAutofit/>
+          </a:bodyPr>
+          <a:lstStyle/>
+          <a:p>
+            <a:endParaRPr sz="2400"/>
+          </a:p>
+        </p:txBody>
+      </p:sp>
+      <p:sp>
+        <p:nvSpPr>
+          <p:cNvPr id="5192" name="Google Shape;5192;p49"/>
+          <p:cNvSpPr/>
+          <p:nvPr/>
+        </p:nvSpPr>
+        <p:spPr>
+          <a:xfrm>
+            <a:off x="2714633" y="3131600"/>
+            <a:ext cx="673600" cy="698000"/>
+          </a:xfrm>
+          <a:prstGeom prst="ellipse">
+            <a:avLst/>
+          </a:prstGeom>
+          <a:solidFill>
+            <a:srgbClr val="C27BA0"/>
+          </a:solidFill>
+          <a:ln w="9525" cap="flat" cmpd="sng">
+            <a:solidFill>
+              <a:schemeClr val="dk2"/>
+            </a:solidFill>
+            <a:prstDash val="solid"/>
+            <a:round/>
+            <a:headEnd type="none" w="sm" len="sm"/>
+            <a:tailEnd type="none" w="sm" len="sm"/>
+          </a:ln>
+        </p:spPr>
+        <p:txBody>
+          <a:bodyPr spcFirstLastPara="1" wrap="square" lIns="121900" tIns="121900" rIns="121900" bIns="121900" anchor="ctr" anchorCtr="0">
+            <a:noAutofit/>
+          </a:bodyPr>
+          <a:lstStyle/>
+          <a:p>
+            <a:endParaRPr sz="2400"/>
+          </a:p>
+        </p:txBody>
+      </p:sp>
+      <p:sp>
+        <p:nvSpPr>
+          <p:cNvPr id="5193" name="Google Shape;5193;p49"/>
+          <p:cNvSpPr/>
+          <p:nvPr/>
+        </p:nvSpPr>
+        <p:spPr>
+          <a:xfrm>
+            <a:off x="4866867" y="1576933"/>
+            <a:ext cx="673600" cy="698000"/>
+          </a:xfrm>
+          <a:prstGeom prst="ellipse">
+            <a:avLst/>
+          </a:prstGeom>
+          <a:solidFill>
+            <a:srgbClr val="76A5AF"/>
+          </a:solidFill>
+          <a:ln w="9525" cap="flat" cmpd="sng">
+            <a:solidFill>
+              <a:schemeClr val="dk2"/>
+            </a:solidFill>
+            <a:prstDash val="solid"/>
+            <a:round/>
+            <a:headEnd type="none" w="sm" len="sm"/>
+            <a:tailEnd type="none" w="sm" len="sm"/>
+          </a:ln>
+        </p:spPr>
+        <p:txBody>
+          <a:bodyPr spcFirstLastPara="1" wrap="square" lIns="121900" tIns="121900" rIns="121900" bIns="121900" anchor="ctr" anchorCtr="0">
+            <a:noAutofit/>
+          </a:bodyPr>
+          <a:lstStyle/>
+          <a:p>
+            <a:endParaRPr sz="2400"/>
+          </a:p>
+        </p:txBody>
+      </p:sp>
+      <p:cxnSp>
+        <p:nvCxnSpPr>
+          <p:cNvPr id="5194" name="Google Shape;5194;p49"/>
+          <p:cNvCxnSpPr>
+            <a:stCxn id="5190" idx="6"/>
+            <a:endCxn id="5193" idx="2"/>
+          </p:cNvCxnSpPr>
+          <p:nvPr/>
+        </p:nvCxnSpPr>
+        <p:spPr>
+          <a:xfrm>
+            <a:off x="3388233" y="781267"/>
+            <a:ext cx="1478800" cy="1144800"/>
+          </a:xfrm>
+          <a:prstGeom prst="straightConnector1">
+            <a:avLst/>
+          </a:prstGeom>
+          <a:noFill/>
+          <a:ln w="9525" cap="flat" cmpd="sng">
+            <a:solidFill>
+              <a:schemeClr val="dk2"/>
+            </a:solidFill>
+            <a:prstDash val="solid"/>
+            <a:round/>
+            <a:headEnd type="none" w="med" len="med"/>
+            <a:tailEnd type="triangle" w="med" len="med"/>
+          </a:ln>
+        </p:spPr>
+      </p:cxnSp>
+      <p:cxnSp>
+        <p:nvCxnSpPr>
+          <p:cNvPr id="5195" name="Google Shape;5195;p49"/>
+          <p:cNvCxnSpPr>
+            <a:stCxn id="5191" idx="6"/>
+            <a:endCxn id="5193" idx="2"/>
+          </p:cNvCxnSpPr>
+          <p:nvPr/>
+        </p:nvCxnSpPr>
+        <p:spPr>
+          <a:xfrm rot="10800000" flipH="1">
+            <a:off x="3388233" y="1925767"/>
+            <a:ext cx="1478800" cy="369600"/>
+          </a:xfrm>
+          <a:prstGeom prst="straightConnector1">
+            <a:avLst/>
+          </a:prstGeom>
+          <a:noFill/>
+          <a:ln w="9525" cap="flat" cmpd="sng">
+            <a:solidFill>
+              <a:schemeClr val="dk2"/>
+            </a:solidFill>
+            <a:prstDash val="solid"/>
+            <a:round/>
+            <a:headEnd type="none" w="med" len="med"/>
+            <a:tailEnd type="triangle" w="med" len="med"/>
+          </a:ln>
+        </p:spPr>
+      </p:cxnSp>
+      <p:cxnSp>
+        <p:nvCxnSpPr>
+          <p:cNvPr id="5196" name="Google Shape;5196;p49"/>
+          <p:cNvCxnSpPr>
+            <a:stCxn id="5192" idx="6"/>
+            <a:endCxn id="5193" idx="2"/>
+          </p:cNvCxnSpPr>
+          <p:nvPr/>
+        </p:nvCxnSpPr>
+        <p:spPr>
+          <a:xfrm rot="10800000" flipH="1">
+            <a:off x="3388233" y="1925800"/>
+            <a:ext cx="1478800" cy="1554800"/>
+          </a:xfrm>
+          <a:prstGeom prst="straightConnector1">
+            <a:avLst/>
+          </a:prstGeom>
+          <a:noFill/>
+          <a:ln w="9525" cap="flat" cmpd="sng">
+            <a:solidFill>
+              <a:schemeClr val="dk2"/>
+            </a:solidFill>
+            <a:prstDash val="solid"/>
+            <a:round/>
+            <a:headEnd type="none" w="med" len="med"/>
+            <a:tailEnd type="triangle" w="med" len="med"/>
+          </a:ln>
+        </p:spPr>
+      </p:cxnSp>
+      <p:sp>
+        <p:nvSpPr>
+          <p:cNvPr id="5197" name="Google Shape;5197;p49"/>
+          <p:cNvSpPr txBox="1"/>
+          <p:nvPr/>
+        </p:nvSpPr>
+        <p:spPr>
+          <a:xfrm>
+            <a:off x="557300" y="444267"/>
+            <a:ext cx="1022800" cy="470800"/>
+          </a:xfrm>
+          <a:prstGeom prst="rect">
+            <a:avLst/>
+          </a:prstGeom>
+          <a:solidFill>
+            <a:srgbClr val="EFEFEF"/>
+          </a:solidFill>
+          <a:ln w="9525" cap="flat" cmpd="sng">
+            <a:solidFill>
+              <a:srgbClr val="000000"/>
+            </a:solidFill>
+            <a:prstDash val="solid"/>
+            <a:round/>
+            <a:headEnd type="none" w="sm" len="sm"/>
+            <a:tailEnd type="none" w="sm" len="sm"/>
+          </a:ln>
+        </p:spPr>
+        <p:txBody>
+          <a:bodyPr spcFirstLastPara="1" wrap="square" lIns="121900" tIns="121900" rIns="121900" bIns="121900" anchor="t" anchorCtr="0">
+            <a:noAutofit/>
+          </a:bodyPr>
+          <a:lstStyle/>
+          <a:p>
+            <a:pPr algn="ctr"/>
+            <a:r>
+              <a:rPr lang="en" sz="1600">
+                <a:latin typeface="Consolas"/>
+                <a:ea typeface="Consolas"/>
+                <a:cs typeface="Consolas"/>
+                <a:sym typeface="Consolas"/>
+              </a:rPr>
+              <a:t>Size</a:t>
+            </a:r>
+            <a:endParaRPr sz="1600">
+              <a:latin typeface="Consolas"/>
+              <a:ea typeface="Consolas"/>
+              <a:cs typeface="Consolas"/>
+              <a:sym typeface="Consolas"/>
+            </a:endParaRPr>
+          </a:p>
+        </p:txBody>
+      </p:sp>
+      <p:sp>
+        <p:nvSpPr>
+          <p:cNvPr id="5198" name="Google Shape;5198;p49"/>
+          <p:cNvSpPr txBox="1"/>
+          <p:nvPr/>
+        </p:nvSpPr>
+        <p:spPr>
+          <a:xfrm>
+            <a:off x="557300" y="1150667"/>
+            <a:ext cx="1022800" cy="470800"/>
+          </a:xfrm>
+          <a:prstGeom prst="rect">
+            <a:avLst/>
+          </a:prstGeom>
+          <a:solidFill>
+            <a:srgbClr val="EFEFEF"/>
+          </a:solidFill>
+          <a:ln w="9525" cap="flat" cmpd="sng">
+            <a:solidFill>
+              <a:srgbClr val="000000"/>
+            </a:solidFill>
+            <a:prstDash val="solid"/>
+            <a:round/>
+            <a:headEnd type="none" w="sm" len="sm"/>
+            <a:tailEnd type="none" w="sm" len="sm"/>
+          </a:ln>
+        </p:spPr>
+        <p:txBody>
+          <a:bodyPr spcFirstLastPara="1" wrap="square" lIns="121900" tIns="121900" rIns="121900" bIns="121900" anchor="t" anchorCtr="0">
+            <a:noAutofit/>
+          </a:bodyPr>
+          <a:lstStyle/>
+          <a:p>
+            <a:pPr algn="ctr"/>
+            <a:r>
+              <a:rPr lang="en" sz="1600">
+                <a:latin typeface="Consolas"/>
+                <a:ea typeface="Consolas"/>
+                <a:cs typeface="Consolas"/>
+                <a:sym typeface="Consolas"/>
+              </a:rPr>
+              <a:t>#bed</a:t>
+            </a:r>
+            <a:endParaRPr sz="1600">
+              <a:latin typeface="Consolas"/>
+              <a:ea typeface="Consolas"/>
+              <a:cs typeface="Consolas"/>
+              <a:sym typeface="Consolas"/>
+            </a:endParaRPr>
+          </a:p>
+        </p:txBody>
+      </p:sp>
+      <p:sp>
+        <p:nvSpPr>
+          <p:cNvPr id="5199" name="Google Shape;5199;p49"/>
+          <p:cNvSpPr txBox="1"/>
+          <p:nvPr/>
+        </p:nvSpPr>
+        <p:spPr>
+          <a:xfrm>
+            <a:off x="557300" y="2197933"/>
+            <a:ext cx="1022800" cy="470800"/>
+          </a:xfrm>
+          <a:prstGeom prst="rect">
+            <a:avLst/>
+          </a:prstGeom>
+          <a:solidFill>
+            <a:srgbClr val="EFEFEF"/>
+          </a:solidFill>
+          <a:ln w="9525" cap="flat" cmpd="sng">
+            <a:solidFill>
+              <a:srgbClr val="000000"/>
+            </a:solidFill>
+            <a:prstDash val="solid"/>
+            <a:round/>
+            <a:headEnd type="none" w="sm" len="sm"/>
+            <a:tailEnd type="none" w="sm" len="sm"/>
+          </a:ln>
+        </p:spPr>
+        <p:txBody>
+          <a:bodyPr spcFirstLastPara="1" wrap="square" lIns="121900" tIns="121900" rIns="121900" bIns="121900" anchor="t" anchorCtr="0">
+            <a:noAutofit/>
+          </a:bodyPr>
+          <a:lstStyle/>
+          <a:p>
+            <a:pPr algn="ctr"/>
+            <a:r>
+              <a:rPr lang="en" sz="1600">
+                <a:latin typeface="Consolas"/>
+                <a:ea typeface="Consolas"/>
+                <a:cs typeface="Consolas"/>
+                <a:sym typeface="Consolas"/>
+              </a:rPr>
+              <a:t>ZIP</a:t>
+            </a:r>
+            <a:endParaRPr sz="1600">
+              <a:latin typeface="Consolas"/>
+              <a:ea typeface="Consolas"/>
+              <a:cs typeface="Consolas"/>
+              <a:sym typeface="Consolas"/>
+            </a:endParaRPr>
+          </a:p>
+        </p:txBody>
+      </p:sp>
+      <p:sp>
+        <p:nvSpPr>
+          <p:cNvPr id="5200" name="Google Shape;5200;p49"/>
+          <p:cNvSpPr txBox="1"/>
+          <p:nvPr/>
+        </p:nvSpPr>
+        <p:spPr>
+          <a:xfrm>
+            <a:off x="557300" y="3245200"/>
+            <a:ext cx="1022800" cy="470800"/>
+          </a:xfrm>
+          <a:prstGeom prst="rect">
+            <a:avLst/>
+          </a:prstGeom>
+          <a:solidFill>
+            <a:srgbClr val="EFEFEF"/>
+          </a:solidFill>
+          <a:ln w="9525" cap="flat" cmpd="sng">
+            <a:solidFill>
+              <a:srgbClr val="000000"/>
+            </a:solidFill>
+            <a:prstDash val="solid"/>
+            <a:round/>
+            <a:headEnd type="none" w="sm" len="sm"/>
+            <a:tailEnd type="none" w="sm" len="sm"/>
+          </a:ln>
+        </p:spPr>
+        <p:txBody>
+          <a:bodyPr spcFirstLastPara="1" wrap="square" lIns="121900" tIns="121900" rIns="121900" bIns="121900" anchor="t" anchorCtr="0">
+            <a:noAutofit/>
+          </a:bodyPr>
+          <a:lstStyle/>
+          <a:p>
+            <a:pPr algn="ctr"/>
+            <a:r>
+              <a:rPr lang="en" sz="1600">
+                <a:latin typeface="Consolas"/>
+                <a:ea typeface="Consolas"/>
+                <a:cs typeface="Consolas"/>
+                <a:sym typeface="Consolas"/>
+              </a:rPr>
+              <a:t>Wealth</a:t>
+            </a:r>
+            <a:endParaRPr sz="1600">
+              <a:latin typeface="Consolas"/>
+              <a:ea typeface="Consolas"/>
+              <a:cs typeface="Consolas"/>
+              <a:sym typeface="Consolas"/>
+            </a:endParaRPr>
+          </a:p>
+        </p:txBody>
+      </p:sp>
+      <p:cxnSp>
+        <p:nvCxnSpPr>
+          <p:cNvPr id="5201" name="Google Shape;5201;p49"/>
+          <p:cNvCxnSpPr>
+            <a:stCxn id="5197" idx="3"/>
+            <a:endCxn id="5190" idx="2"/>
+          </p:cNvCxnSpPr>
+          <p:nvPr/>
+        </p:nvCxnSpPr>
+        <p:spPr>
+          <a:xfrm>
+            <a:off x="1580100" y="679667"/>
+            <a:ext cx="1134400" cy="101600"/>
+          </a:xfrm>
+          <a:prstGeom prst="straightConnector1">
+            <a:avLst/>
+          </a:prstGeom>
+          <a:noFill/>
+          <a:ln w="9525" cap="flat" cmpd="sng">
+            <a:solidFill>
+              <a:schemeClr val="dk2"/>
+            </a:solidFill>
+            <a:prstDash val="solid"/>
+            <a:round/>
+            <a:headEnd type="none" w="med" len="med"/>
+            <a:tailEnd type="triangle" w="med" len="med"/>
+          </a:ln>
+        </p:spPr>
+      </p:cxnSp>
+      <p:cxnSp>
+        <p:nvCxnSpPr>
+          <p:cNvPr id="5202" name="Google Shape;5202;p49"/>
+          <p:cNvCxnSpPr>
+            <a:stCxn id="5198" idx="3"/>
+            <a:endCxn id="5190" idx="2"/>
+          </p:cNvCxnSpPr>
+          <p:nvPr/>
+        </p:nvCxnSpPr>
+        <p:spPr>
+          <a:xfrm rot="10800000" flipH="1">
+            <a:off x="1580100" y="781267"/>
+            <a:ext cx="1134400" cy="604800"/>
+          </a:xfrm>
+          <a:prstGeom prst="straightConnector1">
+            <a:avLst/>
+          </a:prstGeom>
+          <a:noFill/>
+          <a:ln w="9525" cap="flat" cmpd="sng">
+            <a:solidFill>
+              <a:schemeClr val="dk2"/>
+            </a:solidFill>
+            <a:prstDash val="solid"/>
+            <a:round/>
+            <a:headEnd type="none" w="med" len="med"/>
+            <a:tailEnd type="triangle" w="med" len="med"/>
+          </a:ln>
+        </p:spPr>
+      </p:cxnSp>
+      <p:cxnSp>
+        <p:nvCxnSpPr>
+          <p:cNvPr id="5203" name="Google Shape;5203;p49"/>
+          <p:cNvCxnSpPr>
+            <a:stCxn id="5199" idx="3"/>
+            <a:endCxn id="5191" idx="2"/>
+          </p:cNvCxnSpPr>
+          <p:nvPr/>
+        </p:nvCxnSpPr>
+        <p:spPr>
+          <a:xfrm rot="10800000" flipH="1">
+            <a:off x="1580100" y="2295333"/>
+            <a:ext cx="1134400" cy="138000"/>
+          </a:xfrm>
+          <a:prstGeom prst="straightConnector1">
+            <a:avLst/>
+          </a:prstGeom>
+          <a:noFill/>
+          <a:ln w="9525" cap="flat" cmpd="sng">
+            <a:solidFill>
+              <a:schemeClr val="dk2"/>
+            </a:solidFill>
+            <a:prstDash val="solid"/>
+            <a:round/>
+            <a:headEnd type="none" w="med" len="med"/>
+            <a:tailEnd type="triangle" w="med" len="med"/>
+          </a:ln>
+        </p:spPr>
+      </p:cxnSp>
+      <p:cxnSp>
+        <p:nvCxnSpPr>
+          <p:cNvPr id="5204" name="Google Shape;5204;p49"/>
+          <p:cNvCxnSpPr>
+            <a:stCxn id="5200" idx="3"/>
+            <a:endCxn id="5192" idx="2"/>
+          </p:cNvCxnSpPr>
+          <p:nvPr/>
+        </p:nvCxnSpPr>
+        <p:spPr>
+          <a:xfrm>
+            <a:off x="1580100" y="3480600"/>
+            <a:ext cx="1134400" cy="0"/>
+          </a:xfrm>
+          <a:prstGeom prst="straightConnector1">
+            <a:avLst/>
+          </a:prstGeom>
+          <a:noFill/>
+          <a:ln w="9525" cap="flat" cmpd="sng">
+            <a:solidFill>
+              <a:schemeClr val="dk2"/>
+            </a:solidFill>
+            <a:prstDash val="solid"/>
+            <a:round/>
+            <a:headEnd type="none" w="med" len="med"/>
+            <a:tailEnd type="triangle" w="med" len="med"/>
+          </a:ln>
+        </p:spPr>
+      </p:cxnSp>
+      <p:cxnSp>
+        <p:nvCxnSpPr>
+          <p:cNvPr id="5205" name="Google Shape;5205;p49"/>
+          <p:cNvCxnSpPr>
+            <a:stCxn id="5199" idx="3"/>
+            <a:endCxn id="5192" idx="2"/>
+          </p:cNvCxnSpPr>
+          <p:nvPr/>
+        </p:nvCxnSpPr>
+        <p:spPr>
+          <a:xfrm>
+            <a:off x="1580100" y="2433333"/>
+            <a:ext cx="1134400" cy="1047200"/>
+          </a:xfrm>
+          <a:prstGeom prst="straightConnector1">
+            <a:avLst/>
+          </a:prstGeom>
+          <a:noFill/>
+          <a:ln w="9525" cap="flat" cmpd="sng">
+            <a:solidFill>
+              <a:schemeClr val="dk2"/>
+            </a:solidFill>
+            <a:prstDash val="solid"/>
+            <a:round/>
+            <a:headEnd type="none" w="med" len="med"/>
+            <a:tailEnd type="triangle" w="med" len="med"/>
+          </a:ln>
+        </p:spPr>
+      </p:cxnSp>
+      <p:sp>
+        <p:nvSpPr>
+          <p:cNvPr id="5206" name="Google Shape;5206;p49"/>
+          <p:cNvSpPr txBox="1"/>
+          <p:nvPr/>
+        </p:nvSpPr>
+        <p:spPr>
+          <a:xfrm>
+            <a:off x="4002033" y="740567"/>
+            <a:ext cx="1022800" cy="470800"/>
+          </a:xfrm>
+          <a:prstGeom prst="rect">
+            <a:avLst/>
+          </a:prstGeom>
+          <a:noFill/>
+          <a:ln>
+            <a:noFill/>
+          </a:ln>
+        </p:spPr>
+        <p:txBody>
+          <a:bodyPr spcFirstLastPara="1" wrap="square" lIns="121900" tIns="121900" rIns="121900" bIns="121900" anchor="t" anchorCtr="0">
+            <a:noAutofit/>
+          </a:bodyPr>
+          <a:lstStyle/>
+          <a:p>
+            <a:r>
+              <a:rPr lang="en" sz="1467" i="1">
+                <a:solidFill>
+                  <a:srgbClr val="FF0000"/>
+                </a:solidFill>
+                <a:latin typeface="Consolas"/>
+                <a:ea typeface="Consolas"/>
+                <a:cs typeface="Consolas"/>
+                <a:sym typeface="Consolas"/>
+              </a:rPr>
+              <a:t>Family?</a:t>
+            </a:r>
+            <a:endParaRPr sz="1467" i="1">
+              <a:solidFill>
+                <a:srgbClr val="FF0000"/>
+              </a:solidFill>
+              <a:latin typeface="Consolas"/>
+              <a:ea typeface="Consolas"/>
+              <a:cs typeface="Consolas"/>
+              <a:sym typeface="Consolas"/>
+            </a:endParaRPr>
+          </a:p>
+        </p:txBody>
+      </p:sp>
+      <p:sp>
+        <p:nvSpPr>
+          <p:cNvPr id="5207" name="Google Shape;5207;p49"/>
+          <p:cNvSpPr txBox="1"/>
+          <p:nvPr/>
+        </p:nvSpPr>
+        <p:spPr>
+          <a:xfrm>
+            <a:off x="3504800" y="1678533"/>
+            <a:ext cx="762400" cy="470800"/>
+          </a:xfrm>
+          <a:prstGeom prst="rect">
+            <a:avLst/>
+          </a:prstGeom>
+          <a:noFill/>
+          <a:ln>
+            <a:noFill/>
+          </a:ln>
+        </p:spPr>
+        <p:txBody>
+          <a:bodyPr spcFirstLastPara="1" wrap="square" lIns="121900" tIns="121900" rIns="121900" bIns="121900" anchor="t" anchorCtr="0">
+            <a:noAutofit/>
+          </a:bodyPr>
+          <a:lstStyle/>
+          <a:p>
+            <a:r>
+              <a:rPr lang="en" sz="1467" i="1">
+                <a:solidFill>
+                  <a:srgbClr val="FF0000"/>
+                </a:solidFill>
+                <a:latin typeface="Consolas"/>
+                <a:ea typeface="Consolas"/>
+                <a:cs typeface="Consolas"/>
+                <a:sym typeface="Consolas"/>
+              </a:rPr>
+              <a:t>Walk?</a:t>
+            </a:r>
+            <a:endParaRPr sz="1467" i="1">
+              <a:solidFill>
+                <a:srgbClr val="FF0000"/>
+              </a:solidFill>
+              <a:latin typeface="Consolas"/>
+              <a:ea typeface="Consolas"/>
+              <a:cs typeface="Consolas"/>
+              <a:sym typeface="Consolas"/>
+            </a:endParaRPr>
+          </a:p>
+        </p:txBody>
+      </p:sp>
+      <p:sp>
+        <p:nvSpPr>
+          <p:cNvPr id="5208" name="Google Shape;5208;p49"/>
+          <p:cNvSpPr txBox="1"/>
+          <p:nvPr/>
+        </p:nvSpPr>
+        <p:spPr>
+          <a:xfrm>
+            <a:off x="3813200" y="2904267"/>
+            <a:ext cx="908000" cy="470800"/>
+          </a:xfrm>
+          <a:prstGeom prst="rect">
+            <a:avLst/>
+          </a:prstGeom>
+          <a:noFill/>
+          <a:ln>
+            <a:noFill/>
+          </a:ln>
+        </p:spPr>
+        <p:txBody>
+          <a:bodyPr spcFirstLastPara="1" wrap="square" lIns="121900" tIns="121900" rIns="121900" bIns="121900" anchor="t" anchorCtr="0">
+            <a:noAutofit/>
+          </a:bodyPr>
+          <a:lstStyle/>
+          <a:p>
+            <a:r>
+              <a:rPr lang="en" sz="1467" i="1">
+                <a:solidFill>
+                  <a:srgbClr val="FF0000"/>
+                </a:solidFill>
+                <a:latin typeface="Consolas"/>
+                <a:ea typeface="Consolas"/>
+                <a:cs typeface="Consolas"/>
+                <a:sym typeface="Consolas"/>
+              </a:rPr>
+              <a:t>School</a:t>
+            </a:r>
+            <a:endParaRPr sz="1467" i="1">
+              <a:solidFill>
+                <a:srgbClr val="FF0000"/>
+              </a:solidFill>
+              <a:latin typeface="Consolas"/>
+              <a:ea typeface="Consolas"/>
+              <a:cs typeface="Consolas"/>
+              <a:sym typeface="Consolas"/>
+            </a:endParaRPr>
+          </a:p>
+        </p:txBody>
+      </p:sp>
+      <p:cxnSp>
+        <p:nvCxnSpPr>
+          <p:cNvPr id="5209" name="Google Shape;5209;p49"/>
+          <p:cNvCxnSpPr/>
+          <p:nvPr/>
+        </p:nvCxnSpPr>
+        <p:spPr>
+          <a:xfrm>
+            <a:off x="5540467" y="1908133"/>
+            <a:ext cx="535600" cy="11600"/>
+          </a:xfrm>
+          <a:prstGeom prst="straightConnector1">
+            <a:avLst/>
+          </a:prstGeom>
+          <a:noFill/>
+          <a:ln w="9525" cap="flat" cmpd="sng">
+            <a:solidFill>
+              <a:schemeClr val="dk2"/>
+            </a:solidFill>
+            <a:prstDash val="solid"/>
+            <a:round/>
+            <a:headEnd type="none" w="med" len="med"/>
+            <a:tailEnd type="triangle" w="med" len="med"/>
+          </a:ln>
+        </p:spPr>
+      </p:cxnSp>
+      <p:sp>
+        <p:nvSpPr>
+          <p:cNvPr id="5210" name="Google Shape;5210;p49"/>
+          <p:cNvSpPr txBox="1"/>
+          <p:nvPr/>
+        </p:nvSpPr>
+        <p:spPr>
+          <a:xfrm>
+            <a:off x="6075533" y="1690533"/>
+            <a:ext cx="1022800" cy="470800"/>
+          </a:xfrm>
+          <a:prstGeom prst="rect">
+            <a:avLst/>
+          </a:prstGeom>
+          <a:noFill/>
+          <a:ln>
+            <a:noFill/>
+          </a:ln>
+        </p:spPr>
+        <p:txBody>
+          <a:bodyPr spcFirstLastPara="1" wrap="square" lIns="121900" tIns="121900" rIns="121900" bIns="121900" anchor="t" anchorCtr="0">
+            <a:noAutofit/>
+          </a:bodyPr>
+          <a:lstStyle/>
+          <a:p>
+            <a:r>
+              <a:rPr lang="en" sz="1467">
+                <a:solidFill>
+                  <a:srgbClr val="FF0000"/>
+                </a:solidFill>
+                <a:latin typeface="Consolas"/>
+                <a:ea typeface="Consolas"/>
+                <a:cs typeface="Consolas"/>
+                <a:sym typeface="Consolas"/>
+              </a:rPr>
+              <a:t>PRICE ŷ</a:t>
+            </a:r>
+            <a:endParaRPr sz="1467">
+              <a:solidFill>
+                <a:srgbClr val="FF0000"/>
+              </a:solidFill>
+              <a:latin typeface="Consolas"/>
+              <a:ea typeface="Consolas"/>
+              <a:cs typeface="Consolas"/>
+              <a:sym typeface="Consolas"/>
+            </a:endParaRPr>
+          </a:p>
+        </p:txBody>
+      </p:sp>
+      <p:sp>
+        <p:nvSpPr>
+          <p:cNvPr id="5211" name="Google Shape;5211;p49"/>
+          <p:cNvSpPr/>
+          <p:nvPr/>
+        </p:nvSpPr>
+        <p:spPr>
+          <a:xfrm>
+            <a:off x="9382467" y="734667"/>
+            <a:ext cx="673600" cy="698000"/>
+          </a:xfrm>
+          <a:prstGeom prst="ellipse">
+            <a:avLst/>
+          </a:prstGeom>
+          <a:solidFill>
+            <a:srgbClr val="C27BA0"/>
+          </a:solidFill>
+          <a:ln w="9525" cap="flat" cmpd="sng">
+            <a:solidFill>
+              <a:schemeClr val="dk2"/>
+            </a:solidFill>
+            <a:prstDash val="solid"/>
+            <a:round/>
+            <a:headEnd type="none" w="sm" len="sm"/>
+            <a:tailEnd type="none" w="sm" len="sm"/>
+          </a:ln>
+        </p:spPr>
+        <p:txBody>
+          <a:bodyPr spcFirstLastPara="1" wrap="square" lIns="121900" tIns="121900" rIns="121900" bIns="121900" anchor="ctr" anchorCtr="0">
+            <a:noAutofit/>
+          </a:bodyPr>
+          <a:lstStyle/>
+          <a:p>
+            <a:endParaRPr sz="2400"/>
+          </a:p>
+        </p:txBody>
+      </p:sp>
+      <p:sp>
+        <p:nvSpPr>
+          <p:cNvPr id="5212" name="Google Shape;5212;p49"/>
+          <p:cNvSpPr txBox="1"/>
+          <p:nvPr/>
+        </p:nvSpPr>
+        <p:spPr>
+          <a:xfrm>
+            <a:off x="7985667" y="848267"/>
+            <a:ext cx="762400" cy="470800"/>
+          </a:xfrm>
+          <a:prstGeom prst="rect">
+            <a:avLst/>
+          </a:prstGeom>
+          <a:solidFill>
+            <a:srgbClr val="EFEFEF"/>
+          </a:solidFill>
+          <a:ln w="9525" cap="flat" cmpd="sng">
+            <a:solidFill>
+              <a:srgbClr val="000000"/>
+            </a:solidFill>
+            <a:prstDash val="solid"/>
+            <a:round/>
+            <a:headEnd type="none" w="sm" len="sm"/>
+            <a:tailEnd type="none" w="sm" len="sm"/>
+          </a:ln>
+        </p:spPr>
+        <p:txBody>
+          <a:bodyPr spcFirstLastPara="1" wrap="square" lIns="121900" tIns="121900" rIns="121900" bIns="121900" anchor="t" anchorCtr="0">
+            <a:noAutofit/>
+          </a:bodyPr>
+          <a:lstStyle/>
+          <a:p>
+            <a:pPr algn="ctr"/>
+            <a:r>
+              <a:rPr lang="en" sz="1600">
+                <a:latin typeface="Consolas"/>
+                <a:ea typeface="Consolas"/>
+                <a:cs typeface="Consolas"/>
+                <a:sym typeface="Consolas"/>
+              </a:rPr>
+              <a:t>X</a:t>
+            </a:r>
+            <a:endParaRPr sz="1600">
+              <a:latin typeface="Consolas"/>
+              <a:ea typeface="Consolas"/>
+              <a:cs typeface="Consolas"/>
+              <a:sym typeface="Consolas"/>
+            </a:endParaRPr>
+          </a:p>
+        </p:txBody>
+      </p:sp>
+      <p:sp>
+        <p:nvSpPr>
+          <p:cNvPr id="5213" name="Google Shape;5213;p49"/>
+          <p:cNvSpPr txBox="1"/>
+          <p:nvPr/>
+        </p:nvSpPr>
+        <p:spPr>
+          <a:xfrm>
+            <a:off x="10546067" y="848267"/>
+            <a:ext cx="762400" cy="470800"/>
+          </a:xfrm>
+          <a:prstGeom prst="rect">
+            <a:avLst/>
+          </a:prstGeom>
+          <a:solidFill>
+            <a:srgbClr val="EFEFEF"/>
+          </a:solidFill>
+          <a:ln w="9525" cap="flat" cmpd="sng">
+            <a:solidFill>
+              <a:srgbClr val="000000"/>
+            </a:solidFill>
+            <a:prstDash val="solid"/>
+            <a:round/>
+            <a:headEnd type="none" w="sm" len="sm"/>
+            <a:tailEnd type="none" w="sm" len="sm"/>
+          </a:ln>
+        </p:spPr>
+        <p:txBody>
+          <a:bodyPr spcFirstLastPara="1" wrap="square" lIns="121900" tIns="121900" rIns="121900" bIns="121900" anchor="t" anchorCtr="0">
+            <a:noAutofit/>
+          </a:bodyPr>
+          <a:lstStyle/>
+          <a:p>
+            <a:pPr algn="ctr"/>
+            <a:r>
+              <a:rPr lang="en" sz="1600">
+                <a:latin typeface="Consolas"/>
+                <a:ea typeface="Consolas"/>
+                <a:cs typeface="Consolas"/>
+                <a:sym typeface="Consolas"/>
+              </a:rPr>
+              <a:t>Y</a:t>
+            </a:r>
+            <a:endParaRPr sz="1600">
+              <a:latin typeface="Consolas"/>
+              <a:ea typeface="Consolas"/>
+              <a:cs typeface="Consolas"/>
+              <a:sym typeface="Consolas"/>
+            </a:endParaRPr>
+          </a:p>
+        </p:txBody>
+      </p:sp>
+      <p:cxnSp>
+        <p:nvCxnSpPr>
+          <p:cNvPr id="5214" name="Google Shape;5214;p49"/>
+          <p:cNvCxnSpPr>
+            <a:stCxn id="5212" idx="3"/>
+            <a:endCxn id="5211" idx="2"/>
+          </p:cNvCxnSpPr>
+          <p:nvPr/>
+        </p:nvCxnSpPr>
+        <p:spPr>
+          <a:xfrm>
+            <a:off x="8748067" y="1083667"/>
+            <a:ext cx="634400" cy="0"/>
+          </a:xfrm>
+          <a:prstGeom prst="straightConnector1">
+            <a:avLst/>
+          </a:prstGeom>
+          <a:noFill/>
+          <a:ln w="9525" cap="flat" cmpd="sng">
+            <a:solidFill>
+              <a:schemeClr val="dk2"/>
+            </a:solidFill>
+            <a:prstDash val="solid"/>
+            <a:round/>
+            <a:headEnd type="none" w="med" len="med"/>
+            <a:tailEnd type="triangle" w="med" len="med"/>
+          </a:ln>
+        </p:spPr>
+      </p:cxnSp>
+      <p:cxnSp>
+        <p:nvCxnSpPr>
+          <p:cNvPr id="5215" name="Google Shape;5215;p49"/>
+          <p:cNvCxnSpPr>
+            <a:stCxn id="5211" idx="6"/>
+            <a:endCxn id="5213" idx="1"/>
+          </p:cNvCxnSpPr>
+          <p:nvPr/>
+        </p:nvCxnSpPr>
+        <p:spPr>
+          <a:xfrm>
+            <a:off x="10056067" y="1083667"/>
+            <a:ext cx="490000" cy="0"/>
+          </a:xfrm>
+          <a:prstGeom prst="straightConnector1">
+            <a:avLst/>
+          </a:prstGeom>
+          <a:noFill/>
+          <a:ln w="9525" cap="flat" cmpd="sng">
+            <a:solidFill>
+              <a:schemeClr val="dk2"/>
+            </a:solidFill>
+            <a:prstDash val="solid"/>
+            <a:round/>
+            <a:headEnd type="none" w="med" len="med"/>
+            <a:tailEnd type="triangle" w="med" len="med"/>
+          </a:ln>
+        </p:spPr>
+      </p:cxnSp>
+      <p:sp>
+        <p:nvSpPr>
+          <p:cNvPr id="5216" name="Google Shape;5216;p49"/>
+          <p:cNvSpPr/>
+          <p:nvPr/>
+        </p:nvSpPr>
+        <p:spPr>
+          <a:xfrm>
+            <a:off x="2028367" y="5066533"/>
+            <a:ext cx="673600" cy="698000"/>
+          </a:xfrm>
+          <a:prstGeom prst="ellipse">
+            <a:avLst/>
+          </a:prstGeom>
+          <a:solidFill>
+            <a:srgbClr val="C27BA0"/>
+          </a:solidFill>
+          <a:ln w="9525" cap="flat" cmpd="sng">
+            <a:solidFill>
+              <a:schemeClr val="dk2"/>
+            </a:solidFill>
+            <a:prstDash val="solid"/>
+            <a:round/>
+            <a:headEnd type="none" w="sm" len="sm"/>
+            <a:tailEnd type="none" w="sm" len="sm"/>
+          </a:ln>
+        </p:spPr>
+        <p:txBody>
+          <a:bodyPr spcFirstLastPara="1" wrap="square" lIns="121900" tIns="121900" rIns="121900" bIns="121900" anchor="ctr" anchorCtr="0">
+            <a:noAutofit/>
+          </a:bodyPr>
+          <a:lstStyle/>
+          <a:p>
+            <a:endParaRPr sz="2400"/>
+          </a:p>
+        </p:txBody>
+      </p:sp>
+      <p:sp>
+        <p:nvSpPr>
+          <p:cNvPr id="5217" name="Google Shape;5217;p49"/>
+          <p:cNvSpPr txBox="1"/>
+          <p:nvPr/>
+        </p:nvSpPr>
+        <p:spPr>
+          <a:xfrm>
+            <a:off x="631567" y="5180133"/>
+            <a:ext cx="762400" cy="470800"/>
+          </a:xfrm>
+          <a:prstGeom prst="rect">
+            <a:avLst/>
+          </a:prstGeom>
+          <a:solidFill>
+            <a:srgbClr val="EFEFEF"/>
+          </a:solidFill>
+          <a:ln w="9525" cap="flat" cmpd="sng">
+            <a:solidFill>
+              <a:srgbClr val="000000"/>
+            </a:solidFill>
+            <a:prstDash val="solid"/>
+            <a:round/>
+            <a:headEnd type="none" w="sm" len="sm"/>
+            <a:tailEnd type="none" w="sm" len="sm"/>
+          </a:ln>
+        </p:spPr>
+        <p:txBody>
+          <a:bodyPr spcFirstLastPara="1" wrap="square" lIns="121900" tIns="121900" rIns="121900" bIns="121900" anchor="t" anchorCtr="0">
+            <a:noAutofit/>
+          </a:bodyPr>
+          <a:lstStyle/>
+          <a:p>
+            <a:pPr algn="ctr"/>
+            <a:r>
+              <a:rPr lang="en" sz="1600">
+                <a:latin typeface="Consolas"/>
+                <a:ea typeface="Consolas"/>
+                <a:cs typeface="Consolas"/>
+                <a:sym typeface="Consolas"/>
+              </a:rPr>
+              <a:t>X</a:t>
+            </a:r>
+            <a:endParaRPr sz="1600">
+              <a:latin typeface="Consolas"/>
+              <a:ea typeface="Consolas"/>
+              <a:cs typeface="Consolas"/>
+              <a:sym typeface="Consolas"/>
+            </a:endParaRPr>
+          </a:p>
+        </p:txBody>
+      </p:sp>
+      <p:sp>
+        <p:nvSpPr>
+          <p:cNvPr id="5218" name="Google Shape;5218;p49"/>
+          <p:cNvSpPr txBox="1"/>
+          <p:nvPr/>
+        </p:nvSpPr>
+        <p:spPr>
+          <a:xfrm>
+            <a:off x="3395167" y="4570533"/>
+            <a:ext cx="985200" cy="470800"/>
+          </a:xfrm>
+          <a:prstGeom prst="rect">
+            <a:avLst/>
+          </a:prstGeom>
+          <a:solidFill>
+            <a:srgbClr val="EFEFEF"/>
+          </a:solidFill>
+          <a:ln w="9525" cap="flat" cmpd="sng">
+            <a:solidFill>
+              <a:srgbClr val="000000"/>
+            </a:solidFill>
+            <a:prstDash val="solid"/>
+            <a:round/>
+            <a:headEnd type="none" w="sm" len="sm"/>
+            <a:tailEnd type="none" w="sm" len="sm"/>
+          </a:ln>
+        </p:spPr>
+        <p:txBody>
+          <a:bodyPr spcFirstLastPara="1" wrap="square" lIns="121900" tIns="121900" rIns="121900" bIns="121900" anchor="t" anchorCtr="0">
+            <a:noAutofit/>
+          </a:bodyPr>
+          <a:lstStyle/>
+          <a:p>
+            <a:pPr algn="ctr"/>
+            <a:r>
+              <a:rPr lang="en" sz="1467">
+                <a:solidFill>
+                  <a:schemeClr val="dk1"/>
+                </a:solidFill>
+                <a:latin typeface="Consolas"/>
+                <a:ea typeface="Consolas"/>
+                <a:cs typeface="Consolas"/>
+                <a:sym typeface="Consolas"/>
+              </a:rPr>
+              <a:t>Ŷ</a:t>
+            </a:r>
+            <a:r>
+              <a:rPr lang="en" sz="1600">
+                <a:latin typeface="Consolas"/>
+                <a:ea typeface="Consolas"/>
+                <a:cs typeface="Consolas"/>
+                <a:sym typeface="Consolas"/>
+              </a:rPr>
+              <a:t> = 0</a:t>
+            </a:r>
+            <a:endParaRPr sz="1600">
+              <a:latin typeface="Consolas"/>
+              <a:ea typeface="Consolas"/>
+              <a:cs typeface="Consolas"/>
+              <a:sym typeface="Consolas"/>
+            </a:endParaRPr>
+          </a:p>
+        </p:txBody>
+      </p:sp>
+      <p:cxnSp>
+        <p:nvCxnSpPr>
+          <p:cNvPr id="5219" name="Google Shape;5219;p49"/>
+          <p:cNvCxnSpPr>
+            <a:stCxn id="5217" idx="3"/>
+            <a:endCxn id="5216" idx="2"/>
+          </p:cNvCxnSpPr>
+          <p:nvPr/>
+        </p:nvCxnSpPr>
+        <p:spPr>
+          <a:xfrm>
+            <a:off x="1393967" y="5415533"/>
+            <a:ext cx="634400" cy="0"/>
+          </a:xfrm>
+          <a:prstGeom prst="straightConnector1">
+            <a:avLst/>
+          </a:prstGeom>
+          <a:noFill/>
+          <a:ln w="9525" cap="flat" cmpd="sng">
+            <a:solidFill>
+              <a:schemeClr val="dk2"/>
+            </a:solidFill>
+            <a:prstDash val="solid"/>
+            <a:round/>
+            <a:headEnd type="none" w="med" len="med"/>
+            <a:tailEnd type="triangle" w="med" len="med"/>
+          </a:ln>
+        </p:spPr>
+      </p:cxnSp>
+      <p:cxnSp>
+        <p:nvCxnSpPr>
+          <p:cNvPr id="5220" name="Google Shape;5220;p49"/>
+          <p:cNvCxnSpPr>
+            <a:stCxn id="5216" idx="6"/>
+            <a:endCxn id="5218" idx="1"/>
+          </p:cNvCxnSpPr>
+          <p:nvPr/>
+        </p:nvCxnSpPr>
+        <p:spPr>
+          <a:xfrm rot="10800000" flipH="1">
+            <a:off x="2701967" y="4805933"/>
+            <a:ext cx="693200" cy="609600"/>
+          </a:xfrm>
+          <a:prstGeom prst="straightConnector1">
+            <a:avLst/>
+          </a:prstGeom>
+          <a:noFill/>
+          <a:ln w="9525" cap="flat" cmpd="sng">
+            <a:solidFill>
+              <a:schemeClr val="dk2"/>
+            </a:solidFill>
+            <a:prstDash val="solid"/>
+            <a:round/>
+            <a:headEnd type="none" w="med" len="med"/>
+            <a:tailEnd type="triangle" w="med" len="med"/>
+          </a:ln>
+        </p:spPr>
+      </p:cxnSp>
+      <p:cxnSp>
+        <p:nvCxnSpPr>
+          <p:cNvPr id="5221" name="Google Shape;5221;p49"/>
+          <p:cNvCxnSpPr>
+            <a:stCxn id="5216" idx="6"/>
+          </p:cNvCxnSpPr>
+          <p:nvPr/>
+        </p:nvCxnSpPr>
+        <p:spPr>
+          <a:xfrm>
+            <a:off x="2701967" y="5415533"/>
+            <a:ext cx="693200" cy="543600"/>
+          </a:xfrm>
+          <a:prstGeom prst="straightConnector1">
+            <a:avLst/>
+          </a:prstGeom>
+          <a:noFill/>
+          <a:ln w="9525" cap="flat" cmpd="sng">
+            <a:solidFill>
+              <a:schemeClr val="dk2"/>
+            </a:solidFill>
+            <a:prstDash val="solid"/>
+            <a:round/>
+            <a:headEnd type="none" w="med" len="med"/>
+            <a:tailEnd type="triangle" w="med" len="med"/>
+          </a:ln>
+        </p:spPr>
+      </p:cxnSp>
+      <p:sp>
+        <p:nvSpPr>
+          <p:cNvPr id="5222" name="Google Shape;5222;p49"/>
+          <p:cNvSpPr txBox="1"/>
+          <p:nvPr/>
+        </p:nvSpPr>
+        <p:spPr>
+          <a:xfrm>
+            <a:off x="3395167" y="5723733"/>
+            <a:ext cx="985200" cy="470800"/>
+          </a:xfrm>
+          <a:prstGeom prst="rect">
+            <a:avLst/>
+          </a:prstGeom>
+          <a:solidFill>
+            <a:srgbClr val="EFEFEF"/>
+          </a:solidFill>
+          <a:ln w="9525" cap="flat" cmpd="sng">
+            <a:solidFill>
+              <a:srgbClr val="000000"/>
+            </a:solidFill>
+            <a:prstDash val="solid"/>
+            <a:round/>
+            <a:headEnd type="none" w="sm" len="sm"/>
+            <a:tailEnd type="none" w="sm" len="sm"/>
+          </a:ln>
+        </p:spPr>
+        <p:txBody>
+          <a:bodyPr spcFirstLastPara="1" wrap="square" lIns="121900" tIns="121900" rIns="121900" bIns="121900" anchor="t" anchorCtr="0">
+            <a:noAutofit/>
+          </a:bodyPr>
+          <a:lstStyle/>
+          <a:p>
+            <a:pPr algn="ctr"/>
+            <a:r>
+              <a:rPr lang="en" sz="1467">
+                <a:latin typeface="Consolas"/>
+                <a:ea typeface="Consolas"/>
+                <a:cs typeface="Consolas"/>
+                <a:sym typeface="Consolas"/>
+              </a:rPr>
+              <a:t>Ŷ</a:t>
+            </a:r>
+            <a:r>
+              <a:rPr lang="en" sz="1600">
+                <a:latin typeface="Consolas"/>
+                <a:ea typeface="Consolas"/>
+                <a:cs typeface="Consolas"/>
+                <a:sym typeface="Consolas"/>
+              </a:rPr>
+              <a:t> = 1</a:t>
+            </a:r>
+            <a:endParaRPr sz="1600">
+              <a:latin typeface="Consolas"/>
+              <a:ea typeface="Consolas"/>
+              <a:cs typeface="Consolas"/>
+              <a:sym typeface="Consolas"/>
+            </a:endParaRPr>
+          </a:p>
+        </p:txBody>
+      </p:sp>
+      <p:sp>
+        <p:nvSpPr>
+          <p:cNvPr id="5223" name="Google Shape;5223;p49"/>
+          <p:cNvSpPr txBox="1"/>
+          <p:nvPr/>
+        </p:nvSpPr>
+        <p:spPr>
+          <a:xfrm>
+            <a:off x="4938967" y="2959333"/>
+            <a:ext cx="1949200" cy="676800"/>
+          </a:xfrm>
+          <a:prstGeom prst="rect">
+            <a:avLst/>
+          </a:prstGeom>
+          <a:noFill/>
+          <a:ln>
+            <a:noFill/>
+          </a:ln>
+        </p:spPr>
+        <p:txBody>
+          <a:bodyPr spcFirstLastPara="1" wrap="square" lIns="121900" tIns="121900" rIns="121900" bIns="121900" anchor="t" anchorCtr="0">
+            <a:noAutofit/>
+          </a:bodyPr>
+          <a:lstStyle/>
+          <a:p>
+            <a:r>
+              <a:rPr lang="en" sz="2400"/>
+              <a:t>How does NN work (Insprired from Coursera)</a:t>
+            </a:r>
+            <a:endParaRPr sz="2400"/>
+          </a:p>
+        </p:txBody>
+      </p:sp>
+      <p:sp>
+        <p:nvSpPr>
+          <p:cNvPr id="5224" name="Google Shape;5224;p49"/>
+          <p:cNvSpPr txBox="1"/>
+          <p:nvPr/>
+        </p:nvSpPr>
+        <p:spPr>
+          <a:xfrm>
+            <a:off x="4536167" y="5585600"/>
+            <a:ext cx="1949200" cy="676800"/>
+          </a:xfrm>
+          <a:prstGeom prst="rect">
+            <a:avLst/>
+          </a:prstGeom>
+          <a:noFill/>
+          <a:ln>
+            <a:noFill/>
+          </a:ln>
+        </p:spPr>
+        <p:txBody>
+          <a:bodyPr spcFirstLastPara="1" wrap="square" lIns="121900" tIns="121900" rIns="121900" bIns="121900" anchor="t" anchorCtr="0">
+            <a:noAutofit/>
+          </a:bodyPr>
+          <a:lstStyle/>
+          <a:p>
+            <a:r>
+              <a:rPr lang="en" sz="2400"/>
+              <a:t>Logistic Regression</a:t>
+            </a:r>
+            <a:endParaRPr sz="2400"/>
+          </a:p>
+        </p:txBody>
+      </p:sp>
+      <p:sp>
+        <p:nvSpPr>
+          <p:cNvPr id="5225" name="Google Shape;5225;p49"/>
+          <p:cNvSpPr txBox="1"/>
+          <p:nvPr/>
+        </p:nvSpPr>
+        <p:spPr>
+          <a:xfrm>
+            <a:off x="8678433" y="1772167"/>
+            <a:ext cx="1949200" cy="676800"/>
+          </a:xfrm>
+          <a:prstGeom prst="rect">
+            <a:avLst/>
+          </a:prstGeom>
+          <a:noFill/>
+          <a:ln>
+            <a:noFill/>
+          </a:ln>
+        </p:spPr>
+        <p:txBody>
+          <a:bodyPr spcFirstLastPara="1" wrap="square" lIns="121900" tIns="121900" rIns="121900" bIns="121900" anchor="t" anchorCtr="0">
+            <a:noAutofit/>
+          </a:bodyPr>
+          <a:lstStyle/>
+          <a:p>
+            <a:r>
+              <a:rPr lang="en" sz="2400"/>
+              <a:t>Basic Neuron Model</a:t>
+            </a:r>
+            <a:endParaRPr sz="2400"/>
           </a:p>
         </p:txBody>
       </p:sp>
@@ -6200,4 +8481,299 @@
   </a:objectDefaults>
   <a:extraClrSchemeLst/>
 </a:theme>
+</file>
+
+<file path=ppt/theme/theme2.xml><?xml version="1.0" encoding="utf-8"?>
+<a:theme xmlns:a="http://schemas.openxmlformats.org/drawingml/2006/main" name="Office 主题​​">
+  <a:themeElements>
+    <a:clrScheme name="Office">
+      <a:dk1>
+        <a:sysClr val="windowText" lastClr="000000"/>
+      </a:dk1>
+      <a:lt1>
+        <a:sysClr val="window" lastClr="FFFFFF"/>
+      </a:lt1>
+      <a:dk2>
+        <a:srgbClr val="44546A"/>
+      </a:dk2>
+      <a:lt2>
+        <a:srgbClr val="E7E6E6"/>
+      </a:lt2>
+      <a:accent1>
+        <a:srgbClr val="4472C4"/>
+      </a:accent1>
+      <a:accent2>
+        <a:srgbClr val="ED7D31"/>
+      </a:accent2>
+      <a:accent3>
+        <a:srgbClr val="A5A5A5"/>
+      </a:accent3>
+      <a:accent4>
+        <a:srgbClr val="FFC000"/>
+      </a:accent4>
+      <a:accent5>
+        <a:srgbClr val="5B9BD5"/>
+      </a:accent5>
+      <a:accent6>
+        <a:srgbClr val="70AD47"/>
+      </a:accent6>
+      <a:hlink>
+        <a:srgbClr val="0563C1"/>
+      </a:hlink>
+      <a:folHlink>
+        <a:srgbClr val="954F72"/>
+      </a:folHlink>
+    </a:clrScheme>
+    <a:fontScheme name="Office">
+      <a:majorFont>
+        <a:latin typeface="等线 Light" panose="020F0302020204030204"/>
+        <a:ea typeface=""/>
+        <a:cs typeface=""/>
+        <a:font script="Jpan" typeface="游ゴシック Light"/>
+        <a:font script="Hang" typeface="맑은 고딕"/>
+        <a:font script="Hans" typeface="等线 Light"/>
+        <a:font script="Hant" typeface="新細明體"/>
+        <a:font script="Arab" typeface="Times New Roman"/>
+        <a:font script="Hebr" typeface="Times New Roman"/>
+        <a:font script="Thai" typeface="Angsana New"/>
+        <a:font script="Ethi" typeface="Nyala"/>
+        <a:font script="Beng" typeface="Vrinda"/>
+        <a:font script="Gujr" typeface="Shruti"/>
+        <a:font script="Khmr" typeface="MoolBoran"/>
+        <a:font script="Knda" typeface="Tunga"/>
+        <a:font script="Guru" typeface="Raavi"/>
+        <a:font script="Cans" typeface="Euphemia"/>
+        <a:font script="Cher" typeface="Plantagenet Cherokee"/>
+        <a:font script="Yiii" typeface="Microsoft Yi Baiti"/>
+        <a:font script="Tibt" typeface="Microsoft Himalaya"/>
+        <a:font script="Thaa" typeface="MV Boli"/>
+        <a:font script="Deva" typeface="Mangal"/>
+        <a:font script="Telu" typeface="Gautami"/>
+        <a:font script="Taml" typeface="Latha"/>
+        <a:font script="Syrc" typeface="Estrangelo Edessa"/>
+        <a:font script="Orya" typeface="Kalinga"/>
+        <a:font script="Mlym" typeface="Kartika"/>
+        <a:font script="Laoo" typeface="DokChampa"/>
+        <a:font script="Sinh" typeface="Iskoola Pota"/>
+        <a:font script="Mong" typeface="Mongolian Baiti"/>
+        <a:font script="Viet" typeface="Times New Roman"/>
+        <a:font script="Uigh" typeface="Microsoft Uighur"/>
+        <a:font script="Geor" typeface="Sylfaen"/>
+        <a:font script="Armn" typeface="Arial"/>
+        <a:font script="Bugi" typeface="Leelawadee UI"/>
+        <a:font script="Bopo" typeface="Microsoft JhengHei"/>
+        <a:font script="Java" typeface="Javanese Text"/>
+        <a:font script="Lisu" typeface="Segoe UI"/>
+        <a:font script="Mymr" typeface="Myanmar Text"/>
+        <a:font script="Nkoo" typeface="Ebrima"/>
+        <a:font script="Olck" typeface="Nirmala UI"/>
+        <a:font script="Osma" typeface="Ebrima"/>
+        <a:font script="Phag" typeface="Phagspa"/>
+        <a:font script="Syrn" typeface="Estrangelo Edessa"/>
+        <a:font script="Syrj" typeface="Estrangelo Edessa"/>
+        <a:font script="Syre" typeface="Estrangelo Edessa"/>
+        <a:font script="Sora" typeface="Nirmala UI"/>
+        <a:font script="Tale" typeface="Microsoft Tai Le"/>
+        <a:font script="Talu" typeface="Microsoft New Tai Lue"/>
+        <a:font script="Tfng" typeface="Ebrima"/>
+      </a:majorFont>
+      <a:minorFont>
+        <a:latin typeface="等线" panose="020F0502020204030204"/>
+        <a:ea typeface=""/>
+        <a:cs typeface=""/>
+        <a:font script="Jpan" typeface="游ゴシック"/>
+        <a:font script="Hang" typeface="맑은 고딕"/>
+        <a:font script="Hans" typeface="等线"/>
+        <a:font script="Hant" typeface="新細明體"/>
+        <a:font script="Arab" typeface="Arial"/>
+        <a:font script="Hebr" typeface="Arial"/>
+        <a:font script="Thai" typeface="Cordia New"/>
+        <a:font script="Ethi" typeface="Nyala"/>
+        <a:font script="Beng" typeface="Vrinda"/>
+        <a:font script="Gujr" typeface="Shruti"/>
+        <a:font script="Khmr" typeface="DaunPenh"/>
+        <a:font script="Knda" typeface="Tunga"/>
+        <a:font script="Guru" typeface="Raavi"/>
+        <a:font script="Cans" typeface="Euphemia"/>
+        <a:font script="Cher" typeface="Plantagenet Cherokee"/>
+        <a:font script="Yiii" typeface="Microsoft Yi Baiti"/>
+        <a:font script="Tibt" typeface="Microsoft Himalaya"/>
+        <a:font script="Thaa" typeface="MV Boli"/>
+        <a:font script="Deva" typeface="Mangal"/>
+        <a:font script="Telu" typeface="Gautami"/>
+        <a:font script="Taml" typeface="Latha"/>
+        <a:font script="Syrc" typeface="Estrangelo Edessa"/>
+        <a:font script="Orya" typeface="Kalinga"/>
+        <a:font script="Mlym" typeface="Kartika"/>
+        <a:font script="Laoo" typeface="DokChampa"/>
+        <a:font script="Sinh" typeface="Iskoola Pota"/>
+        <a:font script="Mong" typeface="Mongolian Baiti"/>
+        <a:font script="Viet" typeface="Arial"/>
+        <a:font script="Uigh" typeface="Microsoft Uighur"/>
+        <a:font script="Geor" typeface="Sylfaen"/>
+        <a:font script="Armn" typeface="Arial"/>
+        <a:font script="Bugi" typeface="Leelawadee UI"/>
+        <a:font script="Bopo" typeface="Microsoft JhengHei"/>
+        <a:font script="Java" typeface="Javanese Text"/>
+        <a:font script="Lisu" typeface="Segoe UI"/>
+        <a:font script="Mymr" typeface="Myanmar Text"/>
+        <a:font script="Nkoo" typeface="Ebrima"/>
+        <a:font script="Olck" typeface="Nirmala UI"/>
+        <a:font script="Osma" typeface="Ebrima"/>
+        <a:font script="Phag" typeface="Phagspa"/>
+        <a:font script="Syrn" typeface="Estrangelo Edessa"/>
+        <a:font script="Syrj" typeface="Estrangelo Edessa"/>
+        <a:font script="Syre" typeface="Estrangelo Edessa"/>
+        <a:font script="Sora" typeface="Nirmala UI"/>
+        <a:font script="Tale" typeface="Microsoft Tai Le"/>
+        <a:font script="Talu" typeface="Microsoft New Tai Lue"/>
+        <a:font script="Tfng" typeface="Ebrima"/>
+      </a:minorFont>
+    </a:fontScheme>
+    <a:fmtScheme name="Office">
+      <a:fillStyleLst>
+        <a:solidFill>
+          <a:schemeClr val="phClr"/>
+        </a:solidFill>
+        <a:gradFill rotWithShape="1">
+          <a:gsLst>
+            <a:gs pos="0">
+              <a:schemeClr val="phClr">
+                <a:lumMod val="110000"/>
+                <a:satMod val="105000"/>
+                <a:tint val="67000"/>
+              </a:schemeClr>
+            </a:gs>
+            <a:gs pos="50000">
+              <a:schemeClr val="phClr">
+                <a:lumMod val="105000"/>
+                <a:satMod val="103000"/>
+                <a:tint val="73000"/>
+              </a:schemeClr>
+            </a:gs>
+            <a:gs pos="100000">
+              <a:schemeClr val="phClr">
+                <a:lumMod val="105000"/>
+                <a:satMod val="109000"/>
+                <a:tint val="81000"/>
+              </a:schemeClr>
+            </a:gs>
+          </a:gsLst>
+          <a:lin ang="5400000" scaled="0"/>
+        </a:gradFill>
+        <a:gradFill rotWithShape="1">
+          <a:gsLst>
+            <a:gs pos="0">
+              <a:schemeClr val="phClr">
+                <a:satMod val="103000"/>
+                <a:lumMod val="102000"/>
+                <a:tint val="94000"/>
+              </a:schemeClr>
+            </a:gs>
+            <a:gs pos="50000">
+              <a:schemeClr val="phClr">
+                <a:satMod val="110000"/>
+                <a:lumMod val="100000"/>
+                <a:shade val="100000"/>
+              </a:schemeClr>
+            </a:gs>
+            <a:gs pos="100000">
+              <a:schemeClr val="phClr">
+                <a:lumMod val="99000"/>
+                <a:satMod val="120000"/>
+                <a:shade val="78000"/>
+              </a:schemeClr>
+            </a:gs>
+          </a:gsLst>
+          <a:lin ang="5400000" scaled="0"/>
+        </a:gradFill>
+      </a:fillStyleLst>
+      <a:lnStyleLst>
+        <a:ln w="6350" cap="flat" cmpd="sng" algn="ctr">
+          <a:solidFill>
+            <a:schemeClr val="phClr"/>
+          </a:solidFill>
+          <a:prstDash val="solid"/>
+          <a:miter lim="800000"/>
+        </a:ln>
+        <a:ln w="12700" cap="flat" cmpd="sng" algn="ctr">
+          <a:solidFill>
+            <a:schemeClr val="phClr"/>
+          </a:solidFill>
+          <a:prstDash val="solid"/>
+          <a:miter lim="800000"/>
+        </a:ln>
+        <a:ln w="19050" cap="flat" cmpd="sng" algn="ctr">
+          <a:solidFill>
+            <a:schemeClr val="phClr"/>
+          </a:solidFill>
+          <a:prstDash val="solid"/>
+          <a:miter lim="800000"/>
+        </a:ln>
+      </a:lnStyleLst>
+      <a:effectStyleLst>
+        <a:effectStyle>
+          <a:effectLst/>
+        </a:effectStyle>
+        <a:effectStyle>
+          <a:effectLst/>
+        </a:effectStyle>
+        <a:effectStyle>
+          <a:effectLst>
+            <a:outerShdw blurRad="57150" dist="19050" dir="5400000" algn="ctr" rotWithShape="0">
+              <a:srgbClr val="000000">
+                <a:alpha val="63000"/>
+              </a:srgbClr>
+            </a:outerShdw>
+          </a:effectLst>
+        </a:effectStyle>
+      </a:effectStyleLst>
+      <a:bgFillStyleLst>
+        <a:solidFill>
+          <a:schemeClr val="phClr"/>
+        </a:solidFill>
+        <a:solidFill>
+          <a:schemeClr val="phClr">
+            <a:tint val="95000"/>
+            <a:satMod val="170000"/>
+          </a:schemeClr>
+        </a:solidFill>
+        <a:gradFill rotWithShape="1">
+          <a:gsLst>
+            <a:gs pos="0">
+              <a:schemeClr val="phClr">
+                <a:tint val="93000"/>
+                <a:satMod val="150000"/>
+                <a:shade val="98000"/>
+                <a:lumMod val="102000"/>
+              </a:schemeClr>
+            </a:gs>
+            <a:gs pos="50000">
+              <a:schemeClr val="phClr">
+                <a:tint val="98000"/>
+                <a:satMod val="130000"/>
+                <a:shade val="90000"/>
+                <a:lumMod val="103000"/>
+              </a:schemeClr>
+            </a:gs>
+            <a:gs pos="100000">
+              <a:schemeClr val="phClr">
+                <a:shade val="63000"/>
+                <a:satMod val="120000"/>
+              </a:schemeClr>
+            </a:gs>
+          </a:gsLst>
+          <a:lin ang="5400000" scaled="0"/>
+        </a:gradFill>
+      </a:bgFillStyleLst>
+    </a:fmtScheme>
+  </a:themeElements>
+  <a:objectDefaults/>
+  <a:extraClrSchemeLst/>
+  <a:extLst>
+    <a:ext uri="{05A4C25C-085E-4340-85A3-A5531E510DB2}">
+      <thm15:themeFamily xmlns:thm15="http://schemas.microsoft.com/office/thememl/2012/main" name="Office Theme" id="{62F939B6-93AF-4DB8-9C6B-D6C7DFDC589F}" vid="{4A3C46E8-61CC-4603-A589-7422A47A8E4A}"/>
+    </a:ext>
+  </a:extLst>
+</a:theme>
 </file>